--- a/outputs/oracle-packs/account-insights/artifacts/account-insights-sales-deck.pptx
+++ b/outputs/oracle-packs/account-insights/artifacts/account-insights-sales-deck.pptx
@@ -3686,7 +3686,7 @@
                 </a:solidFill>
                 <a:latin typeface="Replica LL TT"/>
               </a:rPr>
-              <a:t>Anchored to Oracle Cloud Infrastructure — every run is OCI GPU consumption an Oracle account exec can sell; Oracle CX is the natural system of record.</a:t>
+              <a:t>Runs on OCI — every run is GPU consumption an Oracle account exec can sell; Oracle CX is the natural system of record.</a:t>
             </a:r>
           </a:p>
         </p:txBody>
@@ -10034,6 +10034,41 @@
                 <a:latin typeface="Replica LL TT"/>
               </a:rPr>
               <a:t>structured per-account records</a:t>
+            </a:r>
+          </a:p>
+        </p:txBody>
+      </p:sp>
+      <p:sp>
+        <p:nvSpPr>
+          <p:cNvPr id="20" name="TextBox 19"/>
+          <p:cNvSpPr txBox="1"/>
+          <p:nvPr/>
+        </p:nvSpPr>
+        <p:spPr>
+          <a:xfrm>
+            <a:off x="384048" y="5989320"/>
+            <a:ext cx="11420856" cy="274320"/>
+          </a:xfrm>
+          <a:prstGeom prst="rect">
+            <a:avLst/>
+          </a:prstGeom>
+          <a:noFill/>
+        </p:spPr>
+        <p:txBody>
+          <a:bodyPr wrap="square" lIns="0" rIns="0" tIns="0" bIns="0" anchor="t">
+            <a:spAutoFit/>
+          </a:bodyPr>
+          <a:lstStyle/>
+          <a:p>
+            <a:pPr algn="l"/>
+            <a:r>
+              <a:rPr sz="850" b="0">
+                <a:solidFill>
+                  <a:srgbClr val="8A9095"/>
+                </a:solidFill>
+                <a:latin typeface="Replica LL TT"/>
+              </a:rPr>
+              <a:t>Integration by tier — oracle-cx — PoV Jumpstart: an agreed extract in, file export out · Integration: API both ways · Scaling: live write-back with idempotency and dedupe-on-write</a:t>
             </a:r>
           </a:p>
         </p:txBody>

--- a/outputs/oracle-packs/account-insights/artifacts/account-insights-sales-deck.pptx
+++ b/outputs/oracle-packs/account-insights/artifacts/account-insights-sales-deck.pptx
@@ -2412,7 +2412,7 @@
                           </a:solidFill>
                           <a:latin typeface="Replica LL TT"/>
                         </a:rPr>
-                        <a:t>◐  ◐ One set of companies, an agreed extract from the system of record and a bounded, licence-cleared source set</a:t>
+                        <a:t>◐  One set of companies, an agreed extract from the system of record and a bounded, licence-cleared source set</a:t>
                       </a:r>
                     </a:p>
                   </a:txBody>
@@ -2435,7 +2435,7 @@
                           </a:solidFill>
                           <a:latin typeface="Replica LL TT"/>
                         </a:rPr>
-                        <a:t>●  ● The client's own licensed commercial feeds, maintained against a versioned catalog of moves</a:t>
+                        <a:t>●  The client's own licensed commercial feeds, maintained against a versioned catalog of moves</a:t>
                       </a:r>
                     </a:p>
                   </a:txBody>
@@ -2458,7 +2458,7 @@
                           </a:solidFill>
                           <a:latin typeface="Replica LL TT"/>
                         </a:rPr>
-                        <a:t>●●  ●● Multi-source, multi-market, with a licensed relationship graph behind the ripple reasoning</a:t>
+                        <a:t>●●  Multi-source, multi-market, with a licensed relationship graph behind the ripple reasoning</a:t>
                       </a:r>
                     </a:p>
                   </a:txBody>
@@ -2506,7 +2506,7 @@
                           </a:solidFill>
                           <a:latin typeface="Replica LL TT"/>
                         </a:rPr>
-                        <a:t>◐  ◐ Relevance, de-duplication and account resolution on the agreed segment; both trigger paths</a:t>
+                        <a:t>◐  Relevance, de-duplication and account resolution on the agreed segment; both trigger paths</a:t>
                       </a:r>
                     </a:p>
                   </a:txBody>
@@ -2529,7 +2529,7 @@
                           </a:solidFill>
                           <a:latin typeface="Replica LL TT"/>
                         </a:rPr>
-                        <a:t>●  ● Recurrence as a standing subscription per account, with delta reasoning and a nothing-material state</a:t>
+                        <a:t>●  Recurrence as a standing subscription per account, with delta reasoning and a nothing-material state</a:t>
                       </a:r>
                     </a:p>
                   </a:txBody>
@@ -2552,7 +2552,7 @@
                           </a:solidFill>
                           <a:latin typeface="Replica LL TT"/>
                         </a:rPr>
-                        <a:t>●●  ●● Deadline-bound triggers and provenance-class gating</a:t>
+                        <a:t>●●  Deadline-bound triggers and provenance-class gating</a:t>
                       </a:r>
                     </a:p>
                   </a:txBody>
@@ -2600,7 +2600,7 @@
                           </a:solidFill>
                           <a:latin typeface="Replica LL TT"/>
                         </a:rPr>
-                        <a:t>◐  ● Opportunity and risk reasoning, service-line mapping, descriptive ripple to two levels, magnitude and confidence scoring</a:t>
+                        <a:t>◐  ● Opportunity and risk reasoning, next-move mapping, descriptive ripple to two levels, magnitude and confidence scoring</a:t>
                       </a:r>
                     </a:p>
                   </a:txBody>
@@ -2623,7 +2623,7 @@
                           </a:solidFill>
                           <a:latin typeface="Replica LL TT"/>
                         </a:rPr>
-                        <a:t>●  ● Dual implication routed to separate owners; configurable catalog target</a:t>
+                        <a:t>●  Dual implication routed to separate owners; configurable catalog target</a:t>
                       </a:r>
                     </a:p>
                   </a:txBody>
@@ -2646,7 +2646,7 @@
                           </a:solidFill>
                           <a:latin typeface="Replica LL TT"/>
                         </a:rPr>
-                        <a:t>●●  ●● Graph-backed ripple, portfolio aggregation, cost-aware ranking</a:t>
+                        <a:t>●●  Graph-backed ripple, portfolio aggregation, cost-aware ranking</a:t>
                       </a:r>
                     </a:p>
                   </a:txBody>
@@ -2717,7 +2717,7 @@
                           </a:solidFill>
                           <a:latin typeface="Replica LL TT"/>
                         </a:rPr>
-                        <a:t>●  ● Human triage of raw inbound; negative assertion recorded as a result</a:t>
+                        <a:t>●  Human triage of raw inbound; negative assertion recorded as a result</a:t>
                       </a:r>
                     </a:p>
                   </a:txBody>
@@ -2740,7 +2740,7 @@
                           </a:solidFill>
                           <a:latin typeface="Replica LL TT"/>
                         </a:rPr>
-                        <a:t>●●  ●● Feedback-driven tuning as a persisted loop; point-in-time replay</a:t>
+                        <a:t>●●  Feedback-driven tuning as a persisted loop; point-in-time replay</a:t>
                       </a:r>
                     </a:p>
                   </a:txBody>
@@ -2788,7 +2788,7 @@
                           </a:solidFill>
                           <a:latin typeface="Replica LL TT"/>
                         </a:rPr>
-                        <a:t>◐  ◐ Structured records exported as files; reviewer decisions captured, never written back</a:t>
+                        <a:t>◐  Structured records exported as files; reviewer decisions captured, never written back</a:t>
                       </a:r>
                     </a:p>
                   </a:txBody>
@@ -2811,7 +2811,7 @@
                           </a:solidFill>
                           <a:latin typeface="Replica LL TT"/>
                         </a:rPr>
-                        <a:t>●  ● Export to the client's system of record and routing to the named account owner</a:t>
+                        <a:t>●  Export to the client's system of record and routing to the named account owner</a:t>
                       </a:r>
                     </a:p>
                   </a:txBody>
@@ -2834,7 +2834,7 @@
                           </a:solidFill>
                           <a:latin typeface="Replica LL TT"/>
                         </a:rPr>
-                        <a:t>●●  ●● Live write-back with idempotency, plus outcome capture feeding scoring</a:t>
+                        <a:t>●●  Live write-back with idempotency, plus outcome capture feeding scoring</a:t>
                       </a:r>
                     </a:p>
                   </a:txBody>
@@ -5662,7 +5662,7 @@
                 </a:solidFill>
                 <a:latin typeface="Replica LL TT"/>
               </a:rPr>
-              <a:t>A global logistics and supply-chain operator. A 12-week contracted proof of concept on NVIDIA AI-Q over OCI, turning external signals and first-party account context into per-account opportunity and risk records with citations, scored for magnitude and confidence, reviewed in a purpose-built reviewer UI. Seven external data sources. Not started at the time of packaging; no results exist.</a:t>
+              <a:t>A global logistics and supply-chain operator. A global logistics and supply-chain operator: a contracted proof of concept on NVIDIA AI-Q over OCI, turning external signals and first-party account context into per-account opportunity and risk records — scored, cited and reviewed in a purpose-built reviewer UI, across seven external data sources. Contracted; results follow the proof of value.</a:t>
             </a:r>
           </a:p>
         </p:txBody>
@@ -5857,7 +5857,7 @@
                 </a:solidFill>
                 <a:latin typeface="Replica LL TT"/>
               </a:rPr>
-              <a:t>HOW THE PLAN GETS MADE</a:t>
+              <a:t>HOW IT WORKS</a:t>
             </a:r>
           </a:p>
         </p:txBody>
@@ -7166,7 +7166,7 @@
                 </a:solidFill>
                 <a:latin typeface="Replica LL TT"/>
               </a:rPr>
-              <a:t>Source: proof of value at a global logistics and supply-chain operator. Figures are illustrative and subject to confirmation. Pack scope differs from the delivered engagement: The pack generalizes what one engagement configured: the signal sources, the account universe and the service catalog are per-client configuration, and the catalog mapping and cross-account ripple reasoning are the reusable core.</a:t>
+              <a:t>First engagement: a global logistics and supply-chain operator, contracted; results follow the proof of value. Pack scope differs from the delivered engagement: The pack generalizes what one engagement configured: the signal sources, the account universe and the service catalog are per-client configuration, and the catalog mapping and cross-account ripple reasoning are the reusable core.</a:t>
             </a:r>
           </a:p>
         </p:txBody>
@@ -7289,7 +7289,7 @@
         <p:spPr>
           <a:xfrm>
             <a:off x="384048" y="2487168"/>
-            <a:ext cx="3648456" cy="2473452"/>
+            <a:ext cx="3648456" cy="2628392"/>
           </a:xfrm>
           <a:prstGeom prst="rect">
             <a:avLst/>
@@ -7453,7 +7453,7 @@
         <p:spPr>
           <a:xfrm>
             <a:off x="4270248" y="2487168"/>
-            <a:ext cx="3648456" cy="2473452"/>
+            <a:ext cx="3648456" cy="2628392"/>
           </a:xfrm>
           <a:prstGeom prst="rect">
             <a:avLst/>
@@ -7603,7 +7603,7 @@
                 </a:solidFill>
                 <a:latin typeface="Replica LL TT"/>
               </a:rPr>
-              <a:t>Supplies the half Oracle's own account intelligence deliberately does not</a:t>
+              <a:t>Complements Oracle's own account intelligence</a:t>
             </a:r>
           </a:p>
         </p:txBody>
@@ -7617,7 +7617,7 @@
         <p:spPr>
           <a:xfrm>
             <a:off x="4507992" y="4394708"/>
-            <a:ext cx="3172968" cy="309880"/>
+            <a:ext cx="3172968" cy="464820"/>
           </a:xfrm>
           <a:prstGeom prst="rect">
             <a:avLst/>
@@ -7638,7 +7638,7 @@
                 </a:solidFill>
                 <a:latin typeface="Replica LL TT"/>
               </a:rPr>
-              <a:t>Sales Command Center is first-party-only by design, so this is complement, not overlap</a:t>
+              <a:t>Sales Command Center works on first-party CX data; this pack brings the external signal and the next move</a:t>
             </a:r>
           </a:p>
         </p:txBody>
@@ -7652,7 +7652,7 @@
         <p:spPr>
           <a:xfrm>
             <a:off x="8156448" y="2487168"/>
-            <a:ext cx="3648456" cy="2473452"/>
+            <a:ext cx="3648456" cy="2628392"/>
           </a:xfrm>
           <a:prstGeom prst="rect">
             <a:avLst/>
@@ -7816,7 +7816,7 @@
         <p:spPr>
           <a:xfrm>
             <a:off x="8394192" y="4394708"/>
-            <a:ext cx="3172968" cy="309880"/>
+            <a:ext cx="3172968" cy="464820"/>
           </a:xfrm>
           <a:prstGeom prst="rect">
             <a:avLst/>
@@ -7916,7 +7916,7 @@
                 </a:solidFill>
                 <a:latin typeface="Replica LL TT"/>
               </a:rPr>
-              <a:t>Ready to test the fit on one customer's account book?</a:t>
+              <a:t>Ready to test the fit on one customer's accounts?</a:t>
             </a:r>
           </a:p>
         </p:txBody>
@@ -10068,7 +10068,7 @@
                 </a:solidFill>
                 <a:latin typeface="Replica LL TT"/>
               </a:rPr>
-              <a:t>Integration by tier — oracle-cx — PoV Jumpstart: an agreed extract in, file export out · Integration: API both ways · Scaling: live write-back with idempotency and dedupe-on-write</a:t>
+              <a:t>Integration by tier — Oracle Customer Experience (CX) — PoV Jumpstart: an agreed extract in, file export out · Integration: API both ways · Scaling: live write-back with idempotency and dedupe-on-write</a:t>
             </a:r>
           </a:p>
         </p:txBody>

--- a/outputs/oracle-packs/account-insights/artifacts/account-insights-sales-deck.pptx
+++ b/outputs/oracle-packs/account-insights/artifacts/account-insights-sales-deck.pptx
@@ -2341,7 +2341,7 @@
                           </a:solidFill>
                           <a:latin typeface="Replica LL TT"/>
                         </a:rPr>
-                        <a:t>Wire it into the account team's working day: the client's own licensed feeds in, the client's system of record out.</a:t>
+                        <a:t>Wire it into the team's working day: their own licensed feeds in, their system of record out.</a:t>
                       </a:r>
                     </a:p>
                   </a:txBody>
@@ -10325,7 +10325,7 @@
                           </a:solidFill>
                           <a:latin typeface="Replica LL TT"/>
                         </a:rPr>
-                        <a:t>Wire it into the account team's working day: the client's own licensed feeds in, the client's system of record out.</a:t>
+                        <a:t>Wire it into the team's working day: their own licensed feeds in, their system of record out.</a:t>
                       </a:r>
                     </a:p>
                   </a:txBody>

--- a/outputs/oracle-packs/account-insights/artifacts/account-insights-sales-deck.pptx
+++ b/outputs/oracle-packs/account-insights/artifacts/account-insights-sales-deck.pptx
@@ -5662,7 +5662,7 @@
                 </a:solidFill>
                 <a:latin typeface="Replica LL TT"/>
               </a:rPr>
-              <a:t>A global logistics and supply-chain operator. A global logistics and supply-chain operator: a contracted proof of concept on NVIDIA AI-Q over OCI, turning external signals and first-party account context into per-account opportunity and risk records — scored, cited and reviewed in a purpose-built reviewer UI, across seven external data sources. Contracted; results follow the proof of value.</a:t>
+              <a:t>A global logistics and supply-chain operator. A contracted proof of concept on NVIDIA AI-Q over OCI, turning external signals and first-party account context into per-account opportunity and risk records — scored, cited and reviewed in a purpose-built reviewer UI, across seven external data sources. Contracted; results follow the proof of value.</a:t>
             </a:r>
           </a:p>
         </p:txBody>

--- a/outputs/oracle-packs/account-insights/artifacts/account-insights-sales-deck.pptx
+++ b/outputs/oracle-packs/account-insights/artifacts/account-insights-sales-deck.pptx
@@ -2123,7 +2123,7 @@
           <a:lstStyle/>
           <a:p>
             <a:r>
-              <a:t>OCI AI Accelerators — Account insights</a:t>
+              <a:t>Oracle AI &amp; Data Solutions</a:t>
             </a:r>
           </a:p>
         </p:txBody>
@@ -2173,7 +2173,7 @@
         </p:nvGraphicFramePr>
         <p:xfrm>
           <a:off x="384048" y="1874520"/>
-          <a:ext cx="11420856" cy="3303397"/>
+          <a:ext cx="11420856" cy="2885059"/>
         </p:xfrm>
         <a:graphic>
           <a:graphicData uri="http://schemas.openxmlformats.org/drawingml/2006/table">
@@ -2375,7 +2375,7 @@
                   </a:tcPr>
                 </a:tc>
               </a:tr>
-              <a:tr h="537210">
+              <a:tr h="397764">
                 <a:tc>
                   <a:txBody>
                     <a:bodyPr wrap="square"/>
@@ -2412,7 +2412,7 @@
                           </a:solidFill>
                           <a:latin typeface="Replica LL TT"/>
                         </a:rPr>
-                        <a:t>◐  One set of companies, an agreed extract from the system of record and a bounded, licence-cleared source set</a:t>
+                        <a:t>◐  One set of companies; an agreed extract; a bounded, licensed source set</a:t>
                       </a:r>
                     </a:p>
                   </a:txBody>
@@ -2435,7 +2435,7 @@
                           </a:solidFill>
                           <a:latin typeface="Replica LL TT"/>
                         </a:rPr>
-                        <a:t>●  The client's own licensed commercial feeds, maintained against a versioned catalog of moves</a:t>
+                        <a:t>●  Their own licensed feeds; a versioned catalog of moves</a:t>
                       </a:r>
                     </a:p>
                   </a:txBody>
@@ -2458,7 +2458,7 @@
                           </a:solidFill>
                           <a:latin typeface="Replica LL TT"/>
                         </a:rPr>
-                        <a:t>●●  Multi-source, multi-market, with a licensed relationship graph behind the ripple reasoning</a:t>
+                        <a:t>●●  Multi-source, multi-market; a licensed relationship graph</a:t>
                       </a:r>
                     </a:p>
                   </a:txBody>
@@ -2469,7 +2469,7 @@
                   </a:tcPr>
                 </a:tc>
               </a:tr>
-              <a:tr h="537210">
+              <a:tr h="397764">
                 <a:tc>
                   <a:txBody>
                     <a:bodyPr wrap="square"/>
@@ -2506,7 +2506,7 @@
                           </a:solidFill>
                           <a:latin typeface="Replica LL TT"/>
                         </a:rPr>
-                        <a:t>◐  Relevance, de-duplication and account resolution on the agreed segment; both trigger paths</a:t>
+                        <a:t>◐  Relevance, de-duplication, account resolution; both trigger paths</a:t>
                       </a:r>
                     </a:p>
                   </a:txBody>
@@ -2529,7 +2529,7 @@
                           </a:solidFill>
                           <a:latin typeface="Replica LL TT"/>
                         </a:rPr>
-                        <a:t>●  Recurrence as a standing subscription per account, with delta reasoning and a nothing-material state</a:t>
+                        <a:t>●  Standing subscription per account; what changed; nothing-material state</a:t>
                       </a:r>
                     </a:p>
                   </a:txBody>
@@ -2563,7 +2563,7 @@
                   </a:tcPr>
                 </a:tc>
               </a:tr>
-              <a:tr h="537210">
+              <a:tr h="397764">
                 <a:tc>
                   <a:txBody>
                     <a:bodyPr wrap="square"/>
@@ -2600,7 +2600,7 @@
                           </a:solidFill>
                           <a:latin typeface="Replica LL TT"/>
                         </a:rPr>
-                        <a:t>◐  ● Opportunity and risk reasoning, next-move mapping, descriptive ripple to two levels, magnitude and confidence scoring</a:t>
+                        <a:t>◐  ● Opportunity and risk reasoning; next-move mapping; ripple to two levels; scoring</a:t>
                       </a:r>
                     </a:p>
                   </a:txBody>
@@ -2694,7 +2694,7 @@
                           </a:solidFill>
                           <a:latin typeface="Replica LL TT"/>
                         </a:rPr>
-                        <a:t>◐  ● Reviewer UI, citations and chain of thought, evaluation harness, feedback capture</a:t>
+                        <a:t>◐  ● Reviewer UI; citations; evaluation harness; feedback capture</a:t>
                       </a:r>
                     </a:p>
                   </a:txBody>
@@ -2788,7 +2788,7 @@
                           </a:solidFill>
                           <a:latin typeface="Replica LL TT"/>
                         </a:rPr>
-                        <a:t>◐  Structured records exported as files; reviewer decisions captured, never written back</a:t>
+                        <a:t>◐  Records exported as files; reviewer decisions captured, not written back</a:t>
                       </a:r>
                     </a:p>
                   </a:txBody>
@@ -2811,7 +2811,7 @@
                           </a:solidFill>
                           <a:latin typeface="Replica LL TT"/>
                         </a:rPr>
-                        <a:t>●  Export to the client's system of record and routing to the named account owner</a:t>
+                        <a:t>●  Export to the system of record; routing to the owner</a:t>
                       </a:r>
                     </a:p>
                   </a:txBody>
@@ -2834,7 +2834,7 @@
                           </a:solidFill>
                           <a:latin typeface="Replica LL TT"/>
                         </a:rPr>
-                        <a:t>●●  Live write-back with idempotency, plus outcome capture feeding scoring</a:t>
+                        <a:t>●●  Live write-back; outcome capture feeding scoring</a:t>
                       </a:r>
                     </a:p>
                   </a:txBody>
@@ -2918,7 +2918,7 @@
           <a:lstStyle/>
           <a:p>
             <a:r>
-              <a:t>OCI AI Accelerators — Account insights</a:t>
+              <a:t>Oracle AI &amp; Data Solutions</a:t>
             </a:r>
           </a:p>
         </p:txBody>
@@ -3725,7 +3725,7 @@
           <a:lstStyle/>
           <a:p>
             <a:r>
-              <a:t>OCI AI Accelerators — Account insights</a:t>
+              <a:t>Oracle AI &amp; Data Solutions</a:t>
             </a:r>
           </a:p>
         </p:txBody>
@@ -4931,7 +4931,7 @@
           <a:lstStyle/>
           <a:p>
             <a:r>
-              <a:t>OCI AI Accelerators — Account insights</a:t>
+              <a:t>Oracle AI &amp; Data Solutions</a:t>
             </a:r>
           </a:p>
         </p:txBody>
@@ -5467,7 +5467,7 @@
           <a:lstStyle/>
           <a:p>
             <a:r>
-              <a:t>OCI AI Accelerators — Account insights</a:t>
+              <a:t>Oracle AI &amp; Data Solutions</a:t>
             </a:r>
           </a:p>
         </p:txBody>
@@ -7205,7 +7205,7 @@
           <a:lstStyle/>
           <a:p>
             <a:r>
-              <a:t>OCI AI Accelerators — Account insights</a:t>
+              <a:t>Oracle AI &amp; Data Solutions</a:t>
             </a:r>
           </a:p>
         </p:txBody>
@@ -7990,7 +7990,7 @@
           <a:lstStyle/>
           <a:p>
             <a:r>
-              <a:t>OCI AI Accelerators — Account insights</a:t>
+              <a:t>Oracle AI &amp; Data Solutions</a:t>
             </a:r>
           </a:p>
         </p:txBody>
@@ -8549,7 +8549,7 @@
                 </a:solidFill>
                 <a:latin typeface="Replica LL TT"/>
               </a:rPr>
-              <a:t>Accelerator business app</a:t>
+              <a:t>Account Insights by SoftServe</a:t>
             </a:r>
           </a:p>
         </p:txBody>
@@ -8834,7 +8834,7 @@
                 </a:solidFill>
                 <a:latin typeface="Replica LL TT"/>
               </a:rPr>
-              <a:t>Agentic engine</a:t>
+              <a:t>NVIDIA AI-Q on NeMo Agent Toolkit</a:t>
             </a:r>
           </a:p>
         </p:txBody>
@@ -9318,7 +9318,7 @@
           <a:lstStyle/>
           <a:p>
             <a:r>
-              <a:t>OCI AI Accelerators — Account insights</a:t>
+              <a:t>Oracle AI &amp; Data Solutions</a:t>
             </a:r>
           </a:p>
         </p:txBody>
@@ -9637,19 +9637,68 @@
       </p:sp>
       <p:sp>
         <p:nvSpPr>
-          <p:cNvPr id="11" name="Rounded Rectangle 10"/>
+          <p:cNvPr id="11" name="TextBox 10"/>
+          <p:cNvSpPr txBox="1"/>
+          <p:nvPr/>
+        </p:nvSpPr>
+        <p:spPr>
+          <a:xfrm>
+            <a:off x="5285232" y="4873752"/>
+            <a:ext cx="5916168" cy="685800"/>
+          </a:xfrm>
+          <a:prstGeom prst="rect">
+            <a:avLst/>
+          </a:prstGeom>
+          <a:noFill/>
+        </p:spPr>
+        <p:txBody>
+          <a:bodyPr wrap="square" lIns="0" rIns="0" tIns="0" bIns="0" anchor="t">
+            <a:spAutoFit/>
+          </a:bodyPr>
+          <a:lstStyle/>
+          <a:p>
+            <a:pPr algn="l"/>
+            <a:r>
+              <a:rPr sz="1288" b="1">
+                <a:solidFill>
+                  <a:srgbClr val="26282B"/>
+                </a:solidFill>
+                <a:latin typeface="Replica LL TT"/>
+              </a:rPr>
+              <a:t>Cloud infrastructure and GPUs</a:t>
+            </a:r>
+          </a:p>
+          <a:p>
+            <a:pPr algn="l">
+              <a:spcBef>
+                <a:spcPts val="200"/>
+              </a:spcBef>
+            </a:pPr>
+            <a:r>
+              <a:rPr sz="966" b="0">
+                <a:solidFill>
+                  <a:srgbClr val="6B7076"/>
+                </a:solidFill>
+                <a:latin typeface="Replica LL TT"/>
+              </a:rPr>
+              <a:t>OCI dedicated AI cluster — reserved GPU capacity for the engine, OCI Kubernetes Engine for the pack's services, Object Storage for sources and artifacts, Oracle AI Database for the retrieval index, API Gateway for exposure</a:t>
+            </a:r>
+          </a:p>
+        </p:txBody>
+      </p:sp>
+      <p:sp>
+        <p:nvSpPr>
+          <p:cNvPr id="12" name="Right Arrow 11"/>
           <p:cNvSpPr/>
           <p:nvPr/>
         </p:nvSpPr>
         <p:spPr>
           <a:xfrm>
-            <a:off x="5285232" y="2715768"/>
-            <a:ext cx="5916168" cy="841248"/>
-          </a:xfrm>
-          <a:prstGeom prst="roundRect">
-            <a:avLst>
-              <a:gd name="adj" fmla="val 10000"/>
-            </a:avLst>
+            <a:off x="3310128" y="2834640"/>
+            <a:ext cx="1463040" cy="100584"/>
+          </a:xfrm>
+          <a:prstGeom prst="rightArrow">
+            <a:avLst/>
           </a:prstGeom>
           <a:solidFill>
             <a:srgbClr val="1485C3"/>
@@ -9674,7 +9723,7 @@
           </a:fontRef>
         </p:style>
         <p:txBody>
-          <a:bodyPr rtlCol="0" anchor="ctr" wrap="square"/>
+          <a:bodyPr rtlCol="0" anchor="ctr"/>
           <a:lstStyle/>
           <a:p>
             <a:pPr algn="ctr"/>
@@ -9683,250 +9732,7 @@
       </p:sp>
       <p:sp>
         <p:nvSpPr>
-          <p:cNvPr id="12" name="TextBox 11"/>
-          <p:cNvSpPr txBox="1"/>
-          <p:nvPr/>
-        </p:nvSpPr>
-        <p:spPr>
-          <a:xfrm>
-            <a:off x="5449824" y="2715768"/>
-            <a:ext cx="5586984" cy="841248"/>
-          </a:xfrm>
-          <a:prstGeom prst="rect">
-            <a:avLst/>
-          </a:prstGeom>
-          <a:noFill/>
-        </p:spPr>
-        <p:txBody>
-          <a:bodyPr wrap="square" lIns="0" rIns="0" tIns="0" bIns="0" anchor="ctr">
-            <a:spAutoFit/>
-          </a:bodyPr>
-          <a:lstStyle/>
-          <a:p>
-            <a:pPr algn="ctr"/>
-            <a:r>
-              <a:rPr sz="1450" b="1">
-                <a:solidFill>
-                  <a:srgbClr val="FFFFFF"/>
-                </a:solidFill>
-                <a:latin typeface="Replica LL TT"/>
-              </a:rPr>
-              <a:t>Accelerator business app</a:t>
-            </a:r>
-          </a:p>
-          <a:p>
-            <a:pPr algn="ctr">
-              <a:spcBef>
-                <a:spcPts val="200"/>
-              </a:spcBef>
-            </a:pPr>
-            <a:r>
-              <a:rPr sz="1000" b="0">
-                <a:solidFill>
-                  <a:srgbClr val="FFFFFF"/>
-                </a:solidFill>
-                <a:latin typeface="Replica LL TT"/>
-              </a:rPr>
-              <a:t>normalize · fan out · reason · map · score · reviewer UI</a:t>
-            </a:r>
-          </a:p>
-        </p:txBody>
-      </p:sp>
-      <p:sp>
-        <p:nvSpPr>
-          <p:cNvPr id="13" name="Rounded Rectangle 12"/>
-          <p:cNvSpPr/>
-          <p:nvPr/>
-        </p:nvSpPr>
-        <p:spPr>
-          <a:xfrm>
-            <a:off x="5285232" y="3767328"/>
-            <a:ext cx="5916168" cy="841248"/>
-          </a:xfrm>
-          <a:prstGeom prst="roundRect">
-            <a:avLst>
-              <a:gd name="adj" fmla="val 10000"/>
-            </a:avLst>
-          </a:prstGeom>
-          <a:solidFill>
-            <a:srgbClr val="F4F6F7"/>
-          </a:solidFill>
-          <a:ln>
-            <a:noFill/>
-          </a:ln>
-          <a:effectLst/>
-        </p:spPr>
-        <p:style>
-          <a:lnRef idx="1">
-            <a:schemeClr val="accent1"/>
-          </a:lnRef>
-          <a:fillRef idx="3">
-            <a:schemeClr val="accent1"/>
-          </a:fillRef>
-          <a:effectRef idx="2">
-            <a:schemeClr val="accent1"/>
-          </a:effectRef>
-          <a:fontRef idx="minor">
-            <a:schemeClr val="lt1"/>
-          </a:fontRef>
-        </p:style>
-        <p:txBody>
-          <a:bodyPr rtlCol="0" anchor="ctr" wrap="square"/>
-          <a:lstStyle/>
-          <a:p>
-            <a:pPr algn="ctr"/>
-          </a:p>
-        </p:txBody>
-      </p:sp>
-      <p:sp>
-        <p:nvSpPr>
-          <p:cNvPr id="14" name="TextBox 13"/>
-          <p:cNvSpPr txBox="1"/>
-          <p:nvPr/>
-        </p:nvSpPr>
-        <p:spPr>
-          <a:xfrm>
-            <a:off x="5449824" y="3767328"/>
-            <a:ext cx="5586984" cy="841248"/>
-          </a:xfrm>
-          <a:prstGeom prst="rect">
-            <a:avLst/>
-          </a:prstGeom>
-          <a:noFill/>
-        </p:spPr>
-        <p:txBody>
-          <a:bodyPr wrap="square" lIns="0" rIns="0" tIns="0" bIns="0" anchor="ctr">
-            <a:spAutoFit/>
-          </a:bodyPr>
-          <a:lstStyle/>
-          <a:p>
-            <a:pPr algn="ctr"/>
-            <a:r>
-              <a:rPr sz="1450" b="1">
-                <a:solidFill>
-                  <a:srgbClr val="44515A"/>
-                </a:solidFill>
-                <a:latin typeface="Replica LL TT"/>
-              </a:rPr>
-              <a:t>Agentic engine</a:t>
-            </a:r>
-          </a:p>
-          <a:p>
-            <a:pPr algn="ctr">
-              <a:spcBef>
-                <a:spcPts val="200"/>
-              </a:spcBef>
-            </a:pPr>
-            <a:r>
-              <a:rPr sz="1000" b="0">
-                <a:solidFill>
-                  <a:srgbClr val="44515A"/>
-                </a:solidFill>
-                <a:latin typeface="Replica LL TT"/>
-              </a:rPr>
-              <a:t>Agentic orchestration and deep research, Retrieval, reranking and citation verification</a:t>
-            </a:r>
-          </a:p>
-        </p:txBody>
-      </p:sp>
-      <p:sp>
-        <p:nvSpPr>
-          <p:cNvPr id="15" name="TextBox 14"/>
-          <p:cNvSpPr txBox="1"/>
-          <p:nvPr/>
-        </p:nvSpPr>
-        <p:spPr>
-          <a:xfrm>
-            <a:off x="5285232" y="4873752"/>
-            <a:ext cx="5916168" cy="685800"/>
-          </a:xfrm>
-          <a:prstGeom prst="rect">
-            <a:avLst/>
-          </a:prstGeom>
-          <a:noFill/>
-        </p:spPr>
-        <p:txBody>
-          <a:bodyPr wrap="square" lIns="0" rIns="0" tIns="0" bIns="0" anchor="t">
-            <a:spAutoFit/>
-          </a:bodyPr>
-          <a:lstStyle/>
-          <a:p>
-            <a:pPr algn="l"/>
-            <a:r>
-              <a:rPr sz="1288" b="1">
-                <a:solidFill>
-                  <a:srgbClr val="26282B"/>
-                </a:solidFill>
-                <a:latin typeface="Replica LL TT"/>
-              </a:rPr>
-              <a:t>Cloud infrastructure and GPUs</a:t>
-            </a:r>
-          </a:p>
-          <a:p>
-            <a:pPr algn="l">
-              <a:spcBef>
-                <a:spcPts val="200"/>
-              </a:spcBef>
-            </a:pPr>
-            <a:r>
-              <a:rPr sz="966" b="0">
-                <a:solidFill>
-                  <a:srgbClr val="6B7076"/>
-                </a:solidFill>
-                <a:latin typeface="Replica LL TT"/>
-              </a:rPr>
-              <a:t>OCI dedicated AI cluster — reserved GPU capacity for the engine, OCI Kubernetes Engine for the pack's services, Object Storage for sources and artifacts, Oracle AI Database for the retrieval index, API Gateway for exposure</a:t>
-            </a:r>
-          </a:p>
-        </p:txBody>
-      </p:sp>
-      <p:sp>
-        <p:nvSpPr>
-          <p:cNvPr id="16" name="Right Arrow 15"/>
-          <p:cNvSpPr/>
-          <p:nvPr/>
-        </p:nvSpPr>
-        <p:spPr>
-          <a:xfrm>
-            <a:off x="3310128" y="2834640"/>
-            <a:ext cx="1463040" cy="100584"/>
-          </a:xfrm>
-          <a:prstGeom prst="rightArrow">
-            <a:avLst/>
-          </a:prstGeom>
-          <a:solidFill>
-            <a:srgbClr val="1485C3"/>
-          </a:solidFill>
-          <a:ln>
-            <a:noFill/>
-          </a:ln>
-          <a:effectLst/>
-        </p:spPr>
-        <p:style>
-          <a:lnRef idx="1">
-            <a:schemeClr val="accent1"/>
-          </a:lnRef>
-          <a:fillRef idx="3">
-            <a:schemeClr val="accent1"/>
-          </a:fillRef>
-          <a:effectRef idx="2">
-            <a:schemeClr val="accent1"/>
-          </a:effectRef>
-          <a:fontRef idx="minor">
-            <a:schemeClr val="lt1"/>
-          </a:fontRef>
-        </p:style>
-        <p:txBody>
-          <a:bodyPr rtlCol="0" anchor="ctr"/>
-          <a:lstStyle/>
-          <a:p>
-            <a:pPr algn="ctr"/>
-          </a:p>
-        </p:txBody>
-      </p:sp>
-      <p:sp>
-        <p:nvSpPr>
-          <p:cNvPr id="17" name="TextBox 16"/>
+          <p:cNvPr id="13" name="TextBox 12"/>
           <p:cNvSpPr txBox="1"/>
           <p:nvPr/>
         </p:nvSpPr>
@@ -9961,7 +9767,7 @@
       </p:sp>
       <p:sp>
         <p:nvSpPr>
-          <p:cNvPr id="18" name="Left Arrow 17"/>
+          <p:cNvPr id="14" name="Left Arrow 13"/>
           <p:cNvSpPr/>
           <p:nvPr/>
         </p:nvSpPr>
@@ -10005,7 +9811,7 @@
       </p:sp>
       <p:sp>
         <p:nvSpPr>
-          <p:cNvPr id="19" name="TextBox 18"/>
+          <p:cNvPr id="15" name="TextBox 14"/>
           <p:cNvSpPr txBox="1"/>
           <p:nvPr/>
         </p:nvSpPr>
@@ -10033,14 +9839,14 @@
                 </a:solidFill>
                 <a:latin typeface="Replica LL TT"/>
               </a:rPr>
-              <a:t>structured per-account records</a:t>
-            </a:r>
-          </a:p>
-        </p:txBody>
-      </p:sp>
-      <p:sp>
-        <p:nvSpPr>
-          <p:cNvPr id="20" name="TextBox 19"/>
+              <a:t>structured per-account records, routed to the owner</a:t>
+            </a:r>
+          </a:p>
+        </p:txBody>
+      </p:sp>
+      <p:sp>
+        <p:nvSpPr>
+          <p:cNvPr id="16" name="TextBox 15"/>
           <p:cNvSpPr txBox="1"/>
           <p:nvPr/>
         </p:nvSpPr>
@@ -10107,7 +9913,7 @@
           <a:lstStyle/>
           <a:p>
             <a:r>
-              <a:t>OCI AI Accelerators — Account insights</a:t>
+              <a:t>Oracle AI &amp; Data Solutions</a:t>
             </a:r>
           </a:p>
         </p:txBody>

--- a/outputs/oracle-packs/account-insights/artifacts/account-insights-sales-deck.pptx
+++ b/outputs/oracle-packs/account-insights/artifacts/account-insights-sales-deck.pptx
@@ -8549,7 +8549,7 @@
                 </a:solidFill>
                 <a:latin typeface="Replica LL TT"/>
               </a:rPr>
-              <a:t>Account Insights by SoftServe</a:t>
+              <a:t>Accelerator business app</a:t>
             </a:r>
           </a:p>
         </p:txBody>
@@ -8834,7 +8834,7 @@
                 </a:solidFill>
                 <a:latin typeface="Replica LL TT"/>
               </a:rPr>
-              <a:t>NVIDIA AI-Q on NeMo Agent Toolkit</a:t>
+              <a:t>Agentic engine</a:t>
             </a:r>
           </a:p>
         </p:txBody>
@@ -9637,68 +9637,19 @@
       </p:sp>
       <p:sp>
         <p:nvSpPr>
-          <p:cNvPr id="11" name="TextBox 10"/>
-          <p:cNvSpPr txBox="1"/>
-          <p:nvPr/>
-        </p:nvSpPr>
-        <p:spPr>
-          <a:xfrm>
-            <a:off x="5285232" y="4873752"/>
-            <a:ext cx="5916168" cy="685800"/>
-          </a:xfrm>
-          <a:prstGeom prst="rect">
-            <a:avLst/>
-          </a:prstGeom>
-          <a:noFill/>
-        </p:spPr>
-        <p:txBody>
-          <a:bodyPr wrap="square" lIns="0" rIns="0" tIns="0" bIns="0" anchor="t">
-            <a:spAutoFit/>
-          </a:bodyPr>
-          <a:lstStyle/>
-          <a:p>
-            <a:pPr algn="l"/>
-            <a:r>
-              <a:rPr sz="1288" b="1">
-                <a:solidFill>
-                  <a:srgbClr val="26282B"/>
-                </a:solidFill>
-                <a:latin typeface="Replica LL TT"/>
-              </a:rPr>
-              <a:t>Cloud infrastructure and GPUs</a:t>
-            </a:r>
-          </a:p>
-          <a:p>
-            <a:pPr algn="l">
-              <a:spcBef>
-                <a:spcPts val="200"/>
-              </a:spcBef>
-            </a:pPr>
-            <a:r>
-              <a:rPr sz="966" b="0">
-                <a:solidFill>
-                  <a:srgbClr val="6B7076"/>
-                </a:solidFill>
-                <a:latin typeface="Replica LL TT"/>
-              </a:rPr>
-              <a:t>OCI dedicated AI cluster — reserved GPU capacity for the engine, OCI Kubernetes Engine for the pack's services, Object Storage for sources and artifacts, Oracle AI Database for the retrieval index, API Gateway for exposure</a:t>
-            </a:r>
-          </a:p>
-        </p:txBody>
-      </p:sp>
-      <p:sp>
-        <p:nvSpPr>
-          <p:cNvPr id="12" name="Right Arrow 11"/>
+          <p:cNvPr id="11" name="Rounded Rectangle 10"/>
           <p:cNvSpPr/>
           <p:nvPr/>
         </p:nvSpPr>
         <p:spPr>
           <a:xfrm>
-            <a:off x="3310128" y="2834640"/>
-            <a:ext cx="1463040" cy="100584"/>
-          </a:xfrm>
-          <a:prstGeom prst="rightArrow">
-            <a:avLst/>
+            <a:off x="5285232" y="2715768"/>
+            <a:ext cx="5916168" cy="841248"/>
+          </a:xfrm>
+          <a:prstGeom prst="roundRect">
+            <a:avLst>
+              <a:gd name="adj" fmla="val 10000"/>
+            </a:avLst>
           </a:prstGeom>
           <a:solidFill>
             <a:srgbClr val="1485C3"/>
@@ -9723,6 +9674,249 @@
           </a:fontRef>
         </p:style>
         <p:txBody>
+          <a:bodyPr rtlCol="0" anchor="ctr" wrap="square"/>
+          <a:lstStyle/>
+          <a:p>
+            <a:pPr algn="ctr"/>
+          </a:p>
+        </p:txBody>
+      </p:sp>
+      <p:sp>
+        <p:nvSpPr>
+          <p:cNvPr id="12" name="TextBox 11"/>
+          <p:cNvSpPr txBox="1"/>
+          <p:nvPr/>
+        </p:nvSpPr>
+        <p:spPr>
+          <a:xfrm>
+            <a:off x="5449824" y="2715768"/>
+            <a:ext cx="5586984" cy="841248"/>
+          </a:xfrm>
+          <a:prstGeom prst="rect">
+            <a:avLst/>
+          </a:prstGeom>
+          <a:noFill/>
+        </p:spPr>
+        <p:txBody>
+          <a:bodyPr wrap="square" lIns="0" rIns="0" tIns="0" bIns="0" anchor="ctr">
+            <a:spAutoFit/>
+          </a:bodyPr>
+          <a:lstStyle/>
+          <a:p>
+            <a:pPr algn="ctr"/>
+            <a:r>
+              <a:rPr sz="1450" b="1">
+                <a:solidFill>
+                  <a:srgbClr val="FFFFFF"/>
+                </a:solidFill>
+                <a:latin typeface="Replica LL TT"/>
+              </a:rPr>
+              <a:t>Accelerator business app</a:t>
+            </a:r>
+          </a:p>
+          <a:p>
+            <a:pPr algn="ctr">
+              <a:spcBef>
+                <a:spcPts val="200"/>
+              </a:spcBef>
+            </a:pPr>
+            <a:r>
+              <a:rPr sz="1000" b="0">
+                <a:solidFill>
+                  <a:srgbClr val="FFFFFF"/>
+                </a:solidFill>
+                <a:latin typeface="Replica LL TT"/>
+              </a:rPr>
+              <a:t>normalize · fan out · reason · map · score · reviewer UI</a:t>
+            </a:r>
+          </a:p>
+        </p:txBody>
+      </p:sp>
+      <p:sp>
+        <p:nvSpPr>
+          <p:cNvPr id="13" name="Rounded Rectangle 12"/>
+          <p:cNvSpPr/>
+          <p:nvPr/>
+        </p:nvSpPr>
+        <p:spPr>
+          <a:xfrm>
+            <a:off x="5285232" y="3767328"/>
+            <a:ext cx="5916168" cy="841248"/>
+          </a:xfrm>
+          <a:prstGeom prst="roundRect">
+            <a:avLst>
+              <a:gd name="adj" fmla="val 10000"/>
+            </a:avLst>
+          </a:prstGeom>
+          <a:solidFill>
+            <a:srgbClr val="F4F6F7"/>
+          </a:solidFill>
+          <a:ln>
+            <a:noFill/>
+          </a:ln>
+          <a:effectLst/>
+        </p:spPr>
+        <p:style>
+          <a:lnRef idx="1">
+            <a:schemeClr val="accent1"/>
+          </a:lnRef>
+          <a:fillRef idx="3">
+            <a:schemeClr val="accent1"/>
+          </a:fillRef>
+          <a:effectRef idx="2">
+            <a:schemeClr val="accent1"/>
+          </a:effectRef>
+          <a:fontRef idx="minor">
+            <a:schemeClr val="lt1"/>
+          </a:fontRef>
+        </p:style>
+        <p:txBody>
+          <a:bodyPr rtlCol="0" anchor="ctr" wrap="square"/>
+          <a:lstStyle/>
+          <a:p>
+            <a:pPr algn="ctr"/>
+          </a:p>
+        </p:txBody>
+      </p:sp>
+      <p:sp>
+        <p:nvSpPr>
+          <p:cNvPr id="14" name="TextBox 13"/>
+          <p:cNvSpPr txBox="1"/>
+          <p:nvPr/>
+        </p:nvSpPr>
+        <p:spPr>
+          <a:xfrm>
+            <a:off x="5449824" y="3767328"/>
+            <a:ext cx="5586984" cy="841248"/>
+          </a:xfrm>
+          <a:prstGeom prst="rect">
+            <a:avLst/>
+          </a:prstGeom>
+          <a:noFill/>
+        </p:spPr>
+        <p:txBody>
+          <a:bodyPr wrap="square" lIns="0" rIns="0" tIns="0" bIns="0" anchor="ctr">
+            <a:spAutoFit/>
+          </a:bodyPr>
+          <a:lstStyle/>
+          <a:p>
+            <a:pPr algn="ctr"/>
+            <a:r>
+              <a:rPr sz="1450" b="1">
+                <a:solidFill>
+                  <a:srgbClr val="44515A"/>
+                </a:solidFill>
+                <a:latin typeface="Replica LL TT"/>
+              </a:rPr>
+              <a:t>Agentic engine</a:t>
+            </a:r>
+          </a:p>
+          <a:p>
+            <a:pPr algn="ctr">
+              <a:spcBef>
+                <a:spcPts val="200"/>
+              </a:spcBef>
+            </a:pPr>
+            <a:r>
+              <a:rPr sz="1000" b="0">
+                <a:solidFill>
+                  <a:srgbClr val="44515A"/>
+                </a:solidFill>
+                <a:latin typeface="Replica LL TT"/>
+              </a:rPr>
+              <a:t>Agentic orchestration and deep research, Retrieval, reranking and citation verification</a:t>
+            </a:r>
+          </a:p>
+        </p:txBody>
+      </p:sp>
+      <p:sp>
+        <p:nvSpPr>
+          <p:cNvPr id="15" name="TextBox 14"/>
+          <p:cNvSpPr txBox="1"/>
+          <p:nvPr/>
+        </p:nvSpPr>
+        <p:spPr>
+          <a:xfrm>
+            <a:off x="5285232" y="4873752"/>
+            <a:ext cx="5916168" cy="685800"/>
+          </a:xfrm>
+          <a:prstGeom prst="rect">
+            <a:avLst/>
+          </a:prstGeom>
+          <a:noFill/>
+        </p:spPr>
+        <p:txBody>
+          <a:bodyPr wrap="square" lIns="0" rIns="0" tIns="0" bIns="0" anchor="t">
+            <a:spAutoFit/>
+          </a:bodyPr>
+          <a:lstStyle/>
+          <a:p>
+            <a:pPr algn="l"/>
+            <a:r>
+              <a:rPr sz="1288" b="1">
+                <a:solidFill>
+                  <a:srgbClr val="26282B"/>
+                </a:solidFill>
+                <a:latin typeface="Replica LL TT"/>
+              </a:rPr>
+              <a:t>Cloud infrastructure and GPUs</a:t>
+            </a:r>
+          </a:p>
+          <a:p>
+            <a:pPr algn="l">
+              <a:spcBef>
+                <a:spcPts val="200"/>
+              </a:spcBef>
+            </a:pPr>
+            <a:r>
+              <a:rPr sz="966" b="0">
+                <a:solidFill>
+                  <a:srgbClr val="6B7076"/>
+                </a:solidFill>
+                <a:latin typeface="Replica LL TT"/>
+              </a:rPr>
+              <a:t>OCI dedicated AI cluster — reserved GPU capacity for the engine, OCI Kubernetes Engine for the pack's services, Object Storage for sources and artifacts, Oracle AI Database for the retrieval index, API Gateway for exposure</a:t>
+            </a:r>
+          </a:p>
+        </p:txBody>
+      </p:sp>
+      <p:sp>
+        <p:nvSpPr>
+          <p:cNvPr id="16" name="Right Arrow 15"/>
+          <p:cNvSpPr/>
+          <p:nvPr/>
+        </p:nvSpPr>
+        <p:spPr>
+          <a:xfrm>
+            <a:off x="3310128" y="2834640"/>
+            <a:ext cx="1463040" cy="100584"/>
+          </a:xfrm>
+          <a:prstGeom prst="rightArrow">
+            <a:avLst/>
+          </a:prstGeom>
+          <a:solidFill>
+            <a:srgbClr val="1485C3"/>
+          </a:solidFill>
+          <a:ln>
+            <a:noFill/>
+          </a:ln>
+          <a:effectLst/>
+        </p:spPr>
+        <p:style>
+          <a:lnRef idx="1">
+            <a:schemeClr val="accent1"/>
+          </a:lnRef>
+          <a:fillRef idx="3">
+            <a:schemeClr val="accent1"/>
+          </a:fillRef>
+          <a:effectRef idx="2">
+            <a:schemeClr val="accent1"/>
+          </a:effectRef>
+          <a:fontRef idx="minor">
+            <a:schemeClr val="lt1"/>
+          </a:fontRef>
+        </p:style>
+        <p:txBody>
           <a:bodyPr rtlCol="0" anchor="ctr"/>
           <a:lstStyle/>
           <a:p>
@@ -9732,7 +9926,7 @@
       </p:sp>
       <p:sp>
         <p:nvSpPr>
-          <p:cNvPr id="13" name="TextBox 12"/>
+          <p:cNvPr id="17" name="TextBox 16"/>
           <p:cNvSpPr txBox="1"/>
           <p:nvPr/>
         </p:nvSpPr>
@@ -9767,7 +9961,7 @@
       </p:sp>
       <p:sp>
         <p:nvSpPr>
-          <p:cNvPr id="14" name="Left Arrow 13"/>
+          <p:cNvPr id="18" name="Left Arrow 17"/>
           <p:cNvSpPr/>
           <p:nvPr/>
         </p:nvSpPr>
@@ -9811,7 +10005,7 @@
       </p:sp>
       <p:sp>
         <p:nvSpPr>
-          <p:cNvPr id="15" name="TextBox 14"/>
+          <p:cNvPr id="19" name="TextBox 18"/>
           <p:cNvSpPr txBox="1"/>
           <p:nvPr/>
         </p:nvSpPr>
@@ -9846,7 +10040,7 @@
       </p:sp>
       <p:sp>
         <p:nvSpPr>
-          <p:cNvPr id="16" name="TextBox 15"/>
+          <p:cNvPr id="20" name="TextBox 19"/>
           <p:cNvSpPr txBox="1"/>
           <p:nvPr/>
         </p:nvSpPr>

--- a/outputs/oracle-packs/account-insights/artifacts/account-insights-sales-deck.pptx
+++ b/outputs/oracle-packs/account-insights/artifacts/account-insights-sales-deck.pptx
@@ -8549,7 +8549,7 @@
                 </a:solidFill>
                 <a:latin typeface="Replica LL TT"/>
               </a:rPr>
-              <a:t>Accelerator business app</a:t>
+              <a:t>Account insights app by SoftServe</a:t>
             </a:r>
           </a:p>
         </p:txBody>
@@ -8834,7 +8834,7 @@
                 </a:solidFill>
                 <a:latin typeface="Replica LL TT"/>
               </a:rPr>
-              <a:t>Agentic engine</a:t>
+              <a:t>NVIDIA AI-Q agentic engine</a:t>
             </a:r>
           </a:p>
         </p:txBody>
@@ -9711,7 +9711,7 @@
                 </a:solidFill>
                 <a:latin typeface="Replica LL TT"/>
               </a:rPr>
-              <a:t>Accelerator business app</a:t>
+              <a:t>Account insights app by SoftServe</a:t>
             </a:r>
           </a:p>
           <a:p>
@@ -9808,7 +9808,7 @@
                 </a:solidFill>
                 <a:latin typeface="Replica LL TT"/>
               </a:rPr>
-              <a:t>Agentic engine</a:t>
+              <a:t>NVIDIA AI-Q agentic engine</a:t>
             </a:r>
           </a:p>
           <a:p>

--- a/outputs/oracle-packs/account-insights/artifacts/account-insights-sales-deck.pptx
+++ b/outputs/oracle-packs/account-insights/artifacts/account-insights-sales-deck.pptx
@@ -8549,7 +8549,7 @@
                 </a:solidFill>
                 <a:latin typeface="Replica LL TT"/>
               </a:rPr>
-              <a:t>Account insights app by SoftServe</a:t>
+              <a:t>Account insights by SoftServe (application)</a:t>
             </a:r>
           </a:p>
         </p:txBody>
@@ -9711,7 +9711,7 @@
                 </a:solidFill>
                 <a:latin typeface="Replica LL TT"/>
               </a:rPr>
-              <a:t>Account insights app by SoftServe</a:t>
+              <a:t>Account insights by SoftServe (application)</a:t>
             </a:r>
           </a:p>
           <a:p>

--- a/outputs/oracle-packs/account-insights/artifacts/account-insights-sales-deck.pptx
+++ b/outputs/oracle-packs/account-insights/artifacts/account-insights-sales-deck.pptx
@@ -1863,58 +1863,14 @@
       </p:sp>
       <p:sp>
         <p:nvSpPr>
-          <p:cNvPr id="3" name="Rectangle 2"/>
-          <p:cNvSpPr/>
-          <p:nvPr/>
-        </p:nvSpPr>
-        <p:spPr>
-          <a:xfrm>
-            <a:off x="0" y="1874520"/>
-            <a:ext cx="822960" cy="41148"/>
-          </a:xfrm>
-          <a:prstGeom prst="rect">
-            <a:avLst/>
-          </a:prstGeom>
-          <a:solidFill>
-            <a:srgbClr val="F36949"/>
-          </a:solidFill>
-          <a:ln>
-            <a:noFill/>
-          </a:ln>
-          <a:effectLst/>
-        </p:spPr>
-        <p:style>
-          <a:lnRef idx="1">
-            <a:schemeClr val="accent1"/>
-          </a:lnRef>
-          <a:fillRef idx="3">
-            <a:schemeClr val="accent1"/>
-          </a:fillRef>
-          <a:effectRef idx="2">
-            <a:schemeClr val="accent1"/>
-          </a:effectRef>
-          <a:fontRef idx="minor">
-            <a:schemeClr val="lt1"/>
-          </a:fontRef>
-        </p:style>
-        <p:txBody>
-          <a:bodyPr rtlCol="0" anchor="ctr" wrap="square"/>
-          <a:lstStyle/>
-          <a:p>
-            <a:pPr algn="ctr"/>
-          </a:p>
-        </p:txBody>
-      </p:sp>
-      <p:sp>
-        <p:nvSpPr>
-          <p:cNvPr id="4" name="TextBox 3"/>
+          <p:cNvPr id="3" name="TextBox 2"/>
           <p:cNvSpPr txBox="1"/>
           <p:nvPr/>
         </p:nvSpPr>
         <p:spPr>
           <a:xfrm>
-            <a:off x="502920" y="1325880"/>
-            <a:ext cx="7315200" cy="256032"/>
+            <a:off x="502920" y="2103120"/>
+            <a:ext cx="5212080" cy="681736"/>
           </a:xfrm>
           <a:prstGeom prst="rect">
             <a:avLst/>
@@ -1929,27 +1885,27 @@
           <a:p>
             <a:pPr algn="l"/>
             <a:r>
-              <a:rPr sz="1150" b="1">
-                <a:solidFill>
-                  <a:srgbClr val="6DB2E2"/>
-                </a:solidFill>
-                <a:latin typeface="Replica LL TT"/>
-              </a:rPr>
-              <a:t>POV JUMPSTART · INTEGRATION · SCALING</a:t>
-            </a:r>
-          </a:p>
-        </p:txBody>
-      </p:sp>
-      <p:sp>
-        <p:nvSpPr>
-          <p:cNvPr id="5" name="TextBox 4"/>
+              <a:rPr sz="4400" b="0">
+                <a:solidFill>
+                  <a:srgbClr val="FFFFFF"/>
+                </a:solidFill>
+                <a:latin typeface="+mj-lt"/>
+              </a:rPr>
+              <a:t>Account insights</a:t>
+            </a:r>
+          </a:p>
+        </p:txBody>
+      </p:sp>
+      <p:sp>
+        <p:nvSpPr>
+          <p:cNvPr id="4" name="TextBox 3"/>
           <p:cNvSpPr txBox="1"/>
           <p:nvPr/>
         </p:nvSpPr>
         <p:spPr>
           <a:xfrm>
-            <a:off x="502920" y="2194560"/>
-            <a:ext cx="8412480" cy="960120"/>
+            <a:off x="502920" y="2912872"/>
+            <a:ext cx="5212080" cy="1659128"/>
           </a:xfrm>
           <a:prstGeom prst="rect">
             <a:avLst/>
@@ -1964,27 +1920,27 @@
           <a:p>
             <a:pPr algn="l"/>
             <a:r>
-              <a:rPr sz="4400" b="0">
-                <a:solidFill>
-                  <a:srgbClr val="FFFFFF"/>
-                </a:solidFill>
-                <a:latin typeface="Replica LL TT"/>
-              </a:rPr>
-              <a:t>Account insights</a:t>
-            </a:r>
-          </a:p>
-        </p:txBody>
-      </p:sp>
-      <p:sp>
-        <p:nvSpPr>
-          <p:cNvPr id="6" name="TextBox 5"/>
+              <a:rPr sz="2000" b="0">
+                <a:solidFill>
+                  <a:srgbClr val="D9E4EC"/>
+                </a:solidFill>
+                <a:latin typeface="+mj-lt"/>
+              </a:rPr>
+              <a:t>More opportunities from the companies you already track: the news, filings and updates on them become a named next move for each — scored, cited and reviewed before anything reaches your systems.</a:t>
+            </a:r>
+          </a:p>
+        </p:txBody>
+      </p:sp>
+      <p:sp>
+        <p:nvSpPr>
+          <p:cNvPr id="5" name="TextBox 4"/>
           <p:cNvSpPr txBox="1"/>
           <p:nvPr/>
         </p:nvSpPr>
         <p:spPr>
           <a:xfrm>
-            <a:off x="502920" y="3218688"/>
-            <a:ext cx="8412480" cy="292608"/>
+            <a:off x="521208" y="4754880"/>
+            <a:ext cx="4206240" cy="274320"/>
           </a:xfrm>
           <a:prstGeom prst="rect">
             <a:avLst/>
@@ -1999,11 +1955,11 @@
           <a:p>
             <a:pPr algn="l"/>
             <a:r>
-              <a:rPr sz="1500" b="0">
-                <a:solidFill>
-                  <a:srgbClr val="6DB2E2"/>
-                </a:solidFill>
-                <a:latin typeface="Replica LL TT"/>
+              <a:rPr sz="1400" b="1">
+                <a:solidFill>
+                  <a:srgbClr val="FFFFFF"/>
+                </a:solidFill>
+                <a:latin typeface="+mj-lt"/>
               </a:rPr>
               <a:t>Accelerator App by SoftServe</a:t>
             </a:r>
@@ -2012,14 +1968,14 @@
       </p:sp>
       <p:sp>
         <p:nvSpPr>
-          <p:cNvPr id="7" name="TextBox 6"/>
+          <p:cNvPr id="6" name="TextBox 5"/>
           <p:cNvSpPr txBox="1"/>
           <p:nvPr/>
         </p:nvSpPr>
         <p:spPr>
           <a:xfrm>
-            <a:off x="502920" y="3749040"/>
-            <a:ext cx="7863840" cy="1097280"/>
+            <a:off x="521208" y="5138928"/>
+            <a:ext cx="5212080" cy="457200"/>
           </a:xfrm>
           <a:prstGeom prst="rect">
             <a:avLst/>
@@ -2034,46 +1990,11 @@
           <a:p>
             <a:pPr algn="l"/>
             <a:r>
-              <a:rPr sz="1800" b="0">
-                <a:solidFill>
-                  <a:srgbClr val="D9E4EC"/>
-                </a:solidFill>
-                <a:latin typeface="Replica LL TT"/>
-              </a:rPr>
-              <a:t>More opportunities from the companies you already track: the news, filings and updates on them become a named next move for each — scored, cited and reviewed before anything reaches your systems.</a:t>
-            </a:r>
-          </a:p>
-        </p:txBody>
-      </p:sp>
-      <p:sp>
-        <p:nvSpPr>
-          <p:cNvPr id="8" name="TextBox 7"/>
-          <p:cNvSpPr txBox="1"/>
-          <p:nvPr/>
-        </p:nvSpPr>
-        <p:spPr>
-          <a:xfrm>
-            <a:off x="502920" y="5212080"/>
-            <a:ext cx="7863840" cy="457200"/>
-          </a:xfrm>
-          <a:prstGeom prst="rect">
-            <a:avLst/>
-          </a:prstGeom>
-          <a:noFill/>
-        </p:spPr>
-        <p:txBody>
-          <a:bodyPr wrap="square" lIns="0" rIns="0" tIns="0" bIns="0" anchor="t">
-            <a:spAutoFit/>
-          </a:bodyPr>
-          <a:lstStyle/>
-          <a:p>
-            <a:pPr algn="l"/>
-            <a:r>
               <a:rPr sz="900" b="1">
                 <a:solidFill>
                   <a:srgbClr val="F36949"/>
                 </a:solidFill>
-                <a:latin typeface="Replica LL TT"/>
+                <a:latin typeface="+mj-lt"/>
               </a:rPr>
               <a:t>WHO IT IS FOR   </a:t>
             </a:r>
@@ -2082,7 +2003,7 @@
                 <a:solidFill>
                   <a:srgbClr val="AEB6BD"/>
                 </a:solidFill>
-                <a:latin typeface="Replica LL TT"/>
+                <a:latin typeface="+mj-lt"/>
               </a:rPr>
               <a:t>Any team responsible for a named set of companies it has to stay current on — the accounts it sells to, the partners it develops, or the companies in its portfolio.</a:t>
             </a:r>
@@ -2122,7 +2043,14 @@
           <a:bodyPr wrap="square"/>
           <a:lstStyle/>
           <a:p>
-            <a:r>
+            <a:pPr algn="r"/>
+            <a:r>
+              <a:rPr sz="900" b="0">
+                <a:solidFill>
+                  <a:srgbClr val="6B7076"/>
+                </a:solidFill>
+                <a:latin typeface="Replica LL TT"/>
+              </a:rPr>
               <a:t>Oracle AI &amp; Data Solutions</a:t>
             </a:r>
           </a:p>
@@ -2173,7 +2101,7 @@
         </p:nvGraphicFramePr>
         <p:xfrm>
           <a:off x="384048" y="1874520"/>
-          <a:ext cx="11420856" cy="2885059"/>
+          <a:ext cx="11420856" cy="4178805"/>
         </p:xfrm>
         <a:graphic>
           <a:graphicData uri="http://schemas.openxmlformats.org/drawingml/2006/table">
@@ -2187,7 +2115,7 @@
                 <a:gridCol w="3029712"/>
                 <a:gridCol w="3029712"/>
               </a:tblGrid>
-              <a:tr h="312547">
+              <a:tr h="376815">
                 <a:tc>
                   <a:txBody>
                     <a:bodyPr wrap="square"/>
@@ -2281,7 +2209,7 @@
                   </a:tcPr>
                 </a:tc>
               </a:tr>
-              <a:tr h="583692">
+              <a:tr h="927875">
                 <a:tc>
                   <a:txBody>
                     <a:bodyPr wrap="square"/>
@@ -2289,7 +2217,7 @@
                     <a:p>
                       <a:pPr algn="l"/>
                       <a:r>
-                        <a:rPr sz="1000" b="1">
+                        <a:rPr sz="1050" b="1">
                           <a:solidFill>
                             <a:srgbClr val="26282B"/>
                           </a:solidFill>
@@ -2312,7 +2240,7 @@
                     <a:p>
                       <a:pPr algn="l"/>
                       <a:r>
-                        <a:rPr sz="1000" b="1">
+                        <a:rPr sz="1050" b="1">
                           <a:solidFill>
                             <a:srgbClr val="26282B"/>
                           </a:solidFill>
@@ -2335,7 +2263,7 @@
                     <a:p>
                       <a:pPr algn="l"/>
                       <a:r>
-                        <a:rPr sz="1000" b="1">
+                        <a:rPr sz="1050" b="1">
                           <a:solidFill>
                             <a:srgbClr val="26282B"/>
                           </a:solidFill>
@@ -2358,7 +2286,7 @@
                     <a:p>
                       <a:pPr algn="l"/>
                       <a:r>
-                        <a:rPr sz="1000" b="1">
+                        <a:rPr sz="1050" b="1">
                           <a:solidFill>
                             <a:srgbClr val="26282B"/>
                           </a:solidFill>
@@ -2375,7 +2303,7 @@
                   </a:tcPr>
                 </a:tc>
               </a:tr>
-              <a:tr h="397764">
+              <a:tr h="535595">
                 <a:tc>
                   <a:txBody>
                     <a:bodyPr wrap="square"/>
@@ -2383,7 +2311,7 @@
                     <a:p>
                       <a:pPr algn="l"/>
                       <a:r>
-                        <a:rPr sz="900" b="1">
+                        <a:rPr sz="1050" b="1">
                           <a:solidFill>
                             <a:srgbClr val="26282B"/>
                           </a:solidFill>
@@ -2406,13 +2334,23 @@
                     <a:p>
                       <a:pPr algn="l"/>
                       <a:r>
-                        <a:rPr sz="900" b="0">
+                        <a:rPr sz="1050" b="0">
+                          <a:solidFill>
+                            <a:srgbClr val="26282B"/>
+                          </a:solidFill>
+                          <a:latin typeface="Apple Symbols"/>
+                          <a:sym typeface="Segoe UI Symbol"/>
+                        </a:rPr>
+                        <a:t>◐  One set of companies; an agreed extract; a bounded, licensed source set</a:t>
+                      </a:r>
+                      <a:r>
+                        <a:rPr sz="1050" b="0">
                           <a:solidFill>
                             <a:srgbClr val="26282B"/>
                           </a:solidFill>
                           <a:latin typeface="Replica LL TT"/>
                         </a:rPr>
-                        <a:t>◐  One set of companies; an agreed extract; a bounded, licensed source set</a:t>
+                        <a:t/>
                       </a:r>
                     </a:p>
                   </a:txBody>
@@ -2429,13 +2367,23 @@
                     <a:p>
                       <a:pPr algn="l"/>
                       <a:r>
-                        <a:rPr sz="900" b="0">
+                        <a:rPr sz="1050" b="0">
+                          <a:solidFill>
+                            <a:srgbClr val="26282B"/>
+                          </a:solidFill>
+                          <a:latin typeface="Apple Symbols"/>
+                          <a:sym typeface="Segoe UI Symbol"/>
+                        </a:rPr>
+                        <a:t>●  Their own licensed feeds; a versioned catalog of moves</a:t>
+                      </a:r>
+                      <a:r>
+                        <a:rPr sz="1050" b="0">
                           <a:solidFill>
                             <a:srgbClr val="26282B"/>
                           </a:solidFill>
                           <a:latin typeface="Replica LL TT"/>
                         </a:rPr>
-                        <a:t>●  Their own licensed feeds; a versioned catalog of moves</a:t>
+                        <a:t/>
                       </a:r>
                     </a:p>
                   </a:txBody>
@@ -2452,13 +2400,23 @@
                     <a:p>
                       <a:pPr algn="l"/>
                       <a:r>
-                        <a:rPr sz="900" b="0">
+                        <a:rPr sz="1050" b="0">
+                          <a:solidFill>
+                            <a:srgbClr val="26282B"/>
+                          </a:solidFill>
+                          <a:latin typeface="Apple Symbols"/>
+                          <a:sym typeface="Segoe UI Symbol"/>
+                        </a:rPr>
+                        <a:t>●●  Multi-source, multi-market; a licensed relationship graph</a:t>
+                      </a:r>
+                      <a:r>
+                        <a:rPr sz="1050" b="0">
                           <a:solidFill>
                             <a:srgbClr val="26282B"/>
                           </a:solidFill>
                           <a:latin typeface="Replica LL TT"/>
                         </a:rPr>
-                        <a:t>●●  Multi-source, multi-market; a licensed relationship graph</a:t>
+                        <a:t/>
                       </a:r>
                     </a:p>
                   </a:txBody>
@@ -2469,7 +2427,7 @@
                   </a:tcPr>
                 </a:tc>
               </a:tr>
-              <a:tr h="397764">
+              <a:tr h="535595">
                 <a:tc>
                   <a:txBody>
                     <a:bodyPr wrap="square"/>
@@ -2477,7 +2435,7 @@
                     <a:p>
                       <a:pPr algn="l"/>
                       <a:r>
-                        <a:rPr sz="900" b="1">
+                        <a:rPr sz="1050" b="1">
                           <a:solidFill>
                             <a:srgbClr val="26282B"/>
                           </a:solidFill>
@@ -2500,13 +2458,23 @@
                     <a:p>
                       <a:pPr algn="l"/>
                       <a:r>
-                        <a:rPr sz="900" b="0">
+                        <a:rPr sz="1050" b="0">
+                          <a:solidFill>
+                            <a:srgbClr val="26282B"/>
+                          </a:solidFill>
+                          <a:latin typeface="Apple Symbols"/>
+                          <a:sym typeface="Segoe UI Symbol"/>
+                        </a:rPr>
+                        <a:t>◐  Relevance, de-duplication, account resolution; both trigger paths</a:t>
+                      </a:r>
+                      <a:r>
+                        <a:rPr sz="1050" b="0">
                           <a:solidFill>
                             <a:srgbClr val="26282B"/>
                           </a:solidFill>
                           <a:latin typeface="Replica LL TT"/>
                         </a:rPr>
-                        <a:t>◐  Relevance, de-duplication, account resolution; both trigger paths</a:t>
+                        <a:t/>
                       </a:r>
                     </a:p>
                   </a:txBody>
@@ -2523,13 +2491,23 @@
                     <a:p>
                       <a:pPr algn="l"/>
                       <a:r>
-                        <a:rPr sz="900" b="0">
+                        <a:rPr sz="1050" b="0">
+                          <a:solidFill>
+                            <a:srgbClr val="26282B"/>
+                          </a:solidFill>
+                          <a:latin typeface="Apple Symbols"/>
+                          <a:sym typeface="Segoe UI Symbol"/>
+                        </a:rPr>
+                        <a:t>●  Standing subscription per account; what changed; nothing-material state</a:t>
+                      </a:r>
+                      <a:r>
+                        <a:rPr sz="1050" b="0">
                           <a:solidFill>
                             <a:srgbClr val="26282B"/>
                           </a:solidFill>
                           <a:latin typeface="Replica LL TT"/>
                         </a:rPr>
-                        <a:t>●  Standing subscription per account; what changed; nothing-material state</a:t>
+                        <a:t/>
                       </a:r>
                     </a:p>
                   </a:txBody>
@@ -2546,13 +2524,23 @@
                     <a:p>
                       <a:pPr algn="l"/>
                       <a:r>
-                        <a:rPr sz="900" b="0">
+                        <a:rPr sz="1050" b="0">
+                          <a:solidFill>
+                            <a:srgbClr val="26282B"/>
+                          </a:solidFill>
+                          <a:latin typeface="Apple Symbols"/>
+                          <a:sym typeface="Segoe UI Symbol"/>
+                        </a:rPr>
+                        <a:t>●●  Deadline-bound triggers and provenance-class gating</a:t>
+                      </a:r>
+                      <a:r>
+                        <a:rPr sz="1050" b="0">
                           <a:solidFill>
                             <a:srgbClr val="26282B"/>
                           </a:solidFill>
                           <a:latin typeface="Replica LL TT"/>
                         </a:rPr>
-                        <a:t>●●  Deadline-bound triggers and provenance-class gating</a:t>
+                        <a:t/>
                       </a:r>
                     </a:p>
                   </a:txBody>
@@ -2563,7 +2551,7 @@
                   </a:tcPr>
                 </a:tc>
               </a:tr>
-              <a:tr h="397764">
+              <a:tr h="731735">
                 <a:tc>
                   <a:txBody>
                     <a:bodyPr wrap="square"/>
@@ -2571,7 +2559,7 @@
                     <a:p>
                       <a:pPr algn="l"/>
                       <a:r>
-                        <a:rPr sz="900" b="1">
+                        <a:rPr sz="1050" b="1">
                           <a:solidFill>
                             <a:srgbClr val="26282B"/>
                           </a:solidFill>
@@ -2594,13 +2582,23 @@
                     <a:p>
                       <a:pPr algn="l"/>
                       <a:r>
-                        <a:rPr sz="900" b="0">
+                        <a:rPr sz="1050" b="0">
+                          <a:solidFill>
+                            <a:srgbClr val="26282B"/>
+                          </a:solidFill>
+                          <a:latin typeface="Apple Symbols"/>
+                          <a:sym typeface="Segoe UI Symbol"/>
+                        </a:rPr>
+                        <a:t>◐</a:t>
+                      </a:r>
+                      <a:r>
+                        <a:rPr sz="1050" b="0">
                           <a:solidFill>
                             <a:srgbClr val="26282B"/>
                           </a:solidFill>
                           <a:latin typeface="Replica LL TT"/>
                         </a:rPr>
-                        <a:t>◐  ● Opportunity and risk reasoning; next-move mapping; ripple to two levels; scoring</a:t>
+                        <a:t>  ● Opportunity and risk reasoning; next-move mapping; ripple to two levels; scoring</a:t>
                       </a:r>
                     </a:p>
                   </a:txBody>
@@ -2617,13 +2615,23 @@
                     <a:p>
                       <a:pPr algn="l"/>
                       <a:r>
-                        <a:rPr sz="900" b="0">
+                        <a:rPr sz="1050" b="0">
+                          <a:solidFill>
+                            <a:srgbClr val="26282B"/>
+                          </a:solidFill>
+                          <a:latin typeface="Apple Symbols"/>
+                          <a:sym typeface="Segoe UI Symbol"/>
+                        </a:rPr>
+                        <a:t>●  Dual implication routed to separate owners; configurable catalog target</a:t>
+                      </a:r>
+                      <a:r>
+                        <a:rPr sz="1050" b="0">
                           <a:solidFill>
                             <a:srgbClr val="26282B"/>
                           </a:solidFill>
                           <a:latin typeface="Replica LL TT"/>
                         </a:rPr>
-                        <a:t>●  Dual implication routed to separate owners; configurable catalog target</a:t>
+                        <a:t/>
                       </a:r>
                     </a:p>
                   </a:txBody>
@@ -2640,13 +2648,23 @@
                     <a:p>
                       <a:pPr algn="l"/>
                       <a:r>
-                        <a:rPr sz="900" b="0">
+                        <a:rPr sz="1050" b="0">
+                          <a:solidFill>
+                            <a:srgbClr val="26282B"/>
+                          </a:solidFill>
+                          <a:latin typeface="Apple Symbols"/>
+                          <a:sym typeface="Segoe UI Symbol"/>
+                        </a:rPr>
+                        <a:t>●●  Graph-backed ripple, portfolio aggregation, cost-aware ranking</a:t>
+                      </a:r>
+                      <a:r>
+                        <a:rPr sz="1050" b="0">
                           <a:solidFill>
                             <a:srgbClr val="26282B"/>
                           </a:solidFill>
                           <a:latin typeface="Replica LL TT"/>
                         </a:rPr>
-                        <a:t>●●  Graph-backed ripple, portfolio aggregation, cost-aware ranking</a:t>
+                        <a:t/>
                       </a:r>
                     </a:p>
                   </a:txBody>
@@ -2657,7 +2675,7 @@
                   </a:tcPr>
                 </a:tc>
               </a:tr>
-              <a:tr h="397764">
+              <a:tr h="535595">
                 <a:tc>
                   <a:txBody>
                     <a:bodyPr wrap="square"/>
@@ -2665,7 +2683,7 @@
                     <a:p>
                       <a:pPr algn="l"/>
                       <a:r>
-                        <a:rPr sz="900" b="1">
+                        <a:rPr sz="1050" b="1">
                           <a:solidFill>
                             <a:srgbClr val="26282B"/>
                           </a:solidFill>
@@ -2688,13 +2706,23 @@
                     <a:p>
                       <a:pPr algn="l"/>
                       <a:r>
-                        <a:rPr sz="900" b="0">
+                        <a:rPr sz="1050" b="0">
+                          <a:solidFill>
+                            <a:srgbClr val="26282B"/>
+                          </a:solidFill>
+                          <a:latin typeface="Apple Symbols"/>
+                          <a:sym typeface="Segoe UI Symbol"/>
+                        </a:rPr>
+                        <a:t>◐</a:t>
+                      </a:r>
+                      <a:r>
+                        <a:rPr sz="1050" b="0">
                           <a:solidFill>
                             <a:srgbClr val="26282B"/>
                           </a:solidFill>
                           <a:latin typeface="Replica LL TT"/>
                         </a:rPr>
-                        <a:t>◐  ● Reviewer UI; citations; evaluation harness; feedback capture</a:t>
+                        <a:t>  ● Reviewer UI; citations; evaluation harness; feedback capture</a:t>
                       </a:r>
                     </a:p>
                   </a:txBody>
@@ -2711,13 +2739,23 @@
                     <a:p>
                       <a:pPr algn="l"/>
                       <a:r>
-                        <a:rPr sz="900" b="0">
+                        <a:rPr sz="1050" b="0">
+                          <a:solidFill>
+                            <a:srgbClr val="26282B"/>
+                          </a:solidFill>
+                          <a:latin typeface="Apple Symbols"/>
+                          <a:sym typeface="Segoe UI Symbol"/>
+                        </a:rPr>
+                        <a:t>●  Human triage of raw inbound; negative assertion recorded as a result</a:t>
+                      </a:r>
+                      <a:r>
+                        <a:rPr sz="1050" b="0">
                           <a:solidFill>
                             <a:srgbClr val="26282B"/>
                           </a:solidFill>
                           <a:latin typeface="Replica LL TT"/>
                         </a:rPr>
-                        <a:t>●  Human triage of raw inbound; negative assertion recorded as a result</a:t>
+                        <a:t/>
                       </a:r>
                     </a:p>
                   </a:txBody>
@@ -2734,13 +2772,23 @@
                     <a:p>
                       <a:pPr algn="l"/>
                       <a:r>
-                        <a:rPr sz="900" b="0">
+                        <a:rPr sz="1050" b="0">
+                          <a:solidFill>
+                            <a:srgbClr val="26282B"/>
+                          </a:solidFill>
+                          <a:latin typeface="Apple Symbols"/>
+                          <a:sym typeface="Segoe UI Symbol"/>
+                        </a:rPr>
+                        <a:t>●●  Feedback-driven tuning as a persisted loop; point-in-time replay</a:t>
+                      </a:r>
+                      <a:r>
+                        <a:rPr sz="1050" b="0">
                           <a:solidFill>
                             <a:srgbClr val="26282B"/>
                           </a:solidFill>
                           <a:latin typeface="Replica LL TT"/>
                         </a:rPr>
-                        <a:t>●●  Feedback-driven tuning as a persisted loop; point-in-time replay</a:t>
+                        <a:t/>
                       </a:r>
                     </a:p>
                   </a:txBody>
@@ -2751,7 +2799,7 @@
                   </a:tcPr>
                 </a:tc>
               </a:tr>
-              <a:tr h="397764">
+              <a:tr h="535595">
                 <a:tc>
                   <a:txBody>
                     <a:bodyPr wrap="square"/>
@@ -2759,7 +2807,7 @@
                     <a:p>
                       <a:pPr algn="l"/>
                       <a:r>
-                        <a:rPr sz="900" b="1">
+                        <a:rPr sz="1050" b="1">
                           <a:solidFill>
                             <a:srgbClr val="26282B"/>
                           </a:solidFill>
@@ -2782,13 +2830,23 @@
                     <a:p>
                       <a:pPr algn="l"/>
                       <a:r>
-                        <a:rPr sz="900" b="0">
+                        <a:rPr sz="1050" b="0">
+                          <a:solidFill>
+                            <a:srgbClr val="26282B"/>
+                          </a:solidFill>
+                          <a:latin typeface="Apple Symbols"/>
+                          <a:sym typeface="Segoe UI Symbol"/>
+                        </a:rPr>
+                        <a:t>◐  Records exported as files; reviewer decisions captured, not written back</a:t>
+                      </a:r>
+                      <a:r>
+                        <a:rPr sz="1050" b="0">
                           <a:solidFill>
                             <a:srgbClr val="26282B"/>
                           </a:solidFill>
                           <a:latin typeface="Replica LL TT"/>
                         </a:rPr>
-                        <a:t>◐  Records exported as files; reviewer decisions captured, not written back</a:t>
+                        <a:t/>
                       </a:r>
                     </a:p>
                   </a:txBody>
@@ -2805,13 +2863,23 @@
                     <a:p>
                       <a:pPr algn="l"/>
                       <a:r>
-                        <a:rPr sz="900" b="0">
+                        <a:rPr sz="1050" b="0">
+                          <a:solidFill>
+                            <a:srgbClr val="26282B"/>
+                          </a:solidFill>
+                          <a:latin typeface="Apple Symbols"/>
+                          <a:sym typeface="Segoe UI Symbol"/>
+                        </a:rPr>
+                        <a:t>●  Export to the system of record; routing to the owner</a:t>
+                      </a:r>
+                      <a:r>
+                        <a:rPr sz="1050" b="0">
                           <a:solidFill>
                             <a:srgbClr val="26282B"/>
                           </a:solidFill>
                           <a:latin typeface="Replica LL TT"/>
                         </a:rPr>
-                        <a:t>●  Export to the system of record; routing to the owner</a:t>
+                        <a:t/>
                       </a:r>
                     </a:p>
                   </a:txBody>
@@ -2828,13 +2896,23 @@
                     <a:p>
                       <a:pPr algn="l"/>
                       <a:r>
-                        <a:rPr sz="900" b="0">
+                        <a:rPr sz="1050" b="0">
+                          <a:solidFill>
+                            <a:srgbClr val="26282B"/>
+                          </a:solidFill>
+                          <a:latin typeface="Apple Symbols"/>
+                          <a:sym typeface="Segoe UI Symbol"/>
+                        </a:rPr>
+                        <a:t>●●  Live write-back; outcome capture feeding scoring</a:t>
+                      </a:r>
+                      <a:r>
+                        <a:rPr sz="1050" b="0">
                           <a:solidFill>
                             <a:srgbClr val="26282B"/>
                           </a:solidFill>
                           <a:latin typeface="Replica LL TT"/>
                         </a:rPr>
-                        <a:t>●●  Live write-back; outcome capture feeding scoring</a:t>
+                        <a:t/>
                       </a:r>
                     </a:p>
                   </a:txBody>
@@ -2877,9 +2955,72 @@
                 <a:solidFill>
                   <a:srgbClr val="8A9095"/>
                 </a:solidFill>
+                <a:latin typeface="Apple Symbols"/>
+              </a:rPr>
+              <a:t>◐</a:t>
+            </a:r>
+            <a:r>
+              <a:rPr sz="850" b="0">
+                <a:solidFill>
+                  <a:srgbClr val="8A9095"/>
+                </a:solidFill>
                 <a:latin typeface="Replica LL TT"/>
               </a:rPr>
-              <a:t>◐ partial   ● included   ●● multi-region / advanced   — not in this tier</a:t>
+              <a:t> partial   </a:t>
+            </a:r>
+            <a:r>
+              <a:rPr sz="850" b="0">
+                <a:solidFill>
+                  <a:srgbClr val="8A9095"/>
+                </a:solidFill>
+                <a:latin typeface="Apple Symbols"/>
+              </a:rPr>
+              <a:t>●</a:t>
+            </a:r>
+            <a:r>
+              <a:rPr sz="850" b="0">
+                <a:solidFill>
+                  <a:srgbClr val="8A9095"/>
+                </a:solidFill>
+                <a:latin typeface="Replica LL TT"/>
+              </a:rPr>
+              <a:t> included   </a:t>
+            </a:r>
+            <a:r>
+              <a:rPr sz="850" b="0">
+                <a:solidFill>
+                  <a:srgbClr val="8A9095"/>
+                </a:solidFill>
+                <a:latin typeface="Apple Symbols"/>
+              </a:rPr>
+              <a:t>●●</a:t>
+            </a:r>
+            <a:r>
+              <a:rPr sz="850" b="0">
+                <a:solidFill>
+                  <a:srgbClr val="8A9095"/>
+                </a:solidFill>
+                <a:latin typeface="Replica LL TT"/>
+              </a:rPr>
+              <a:t> multi-region / advanced   </a:t>
+            </a:r>
+            <a:r>
+              <a:rPr sz="850" b="0">
+                <a:solidFill>
+                  <a:srgbClr val="8A9095"/>
+                </a:solidFill>
+                <a:latin typeface="Apple Symbols"/>
+              </a:rPr>
+              <a:t>—</a:t>
+            </a:r>
+            <a:r>
+              <a:rPr sz="850" b="0">
+                <a:solidFill>
+                  <a:srgbClr val="8A9095"/>
+                </a:solidFill>
+                <a:latin typeface="Replica LL TT"/>
+              </a:rPr>
+              <a:t> not in this tier</a:t>
             </a:r>
           </a:p>
         </p:txBody>
@@ -2917,7 +3058,14 @@
           <a:bodyPr wrap="square"/>
           <a:lstStyle/>
           <a:p>
-            <a:r>
+            <a:pPr algn="r"/>
+            <a:r>
+              <a:rPr sz="900" b="0">
+                <a:solidFill>
+                  <a:srgbClr val="6B7076"/>
+                </a:solidFill>
+                <a:latin typeface="Replica LL TT"/>
+              </a:rPr>
               <a:t>Oracle AI &amp; Data Solutions</a:t>
             </a:r>
           </a:p>
@@ -2960,7 +3108,7 @@
       </p:sp>
       <p:sp>
         <p:nvSpPr>
-          <p:cNvPr id="5" name="Rounded Rectangle 4"/>
+          <p:cNvPr id="5" name="Rectangle 4"/>
           <p:cNvSpPr/>
           <p:nvPr/>
         </p:nvSpPr>
@@ -2969,7 +3117,7 @@
             <a:off x="384048" y="1755648"/>
             <a:ext cx="5504688" cy="3364992"/>
           </a:xfrm>
-          <a:prstGeom prst="roundRect">
+          <a:prstGeom prst="rect">
             <a:avLst/>
           </a:prstGeom>
           <a:solidFill>
@@ -3048,7 +3196,7 @@
       </p:sp>
       <p:sp>
         <p:nvSpPr>
-          <p:cNvPr id="7" name="Rounded Rectangle 6"/>
+          <p:cNvPr id="7" name="Rectangle 6"/>
           <p:cNvSpPr/>
           <p:nvPr/>
         </p:nvSpPr>
@@ -3057,7 +3205,7 @@
             <a:off x="6300216" y="1755648"/>
             <a:ext cx="5504688" cy="3364992"/>
           </a:xfrm>
-          <a:prstGeom prst="roundRect">
+          <a:prstGeom prst="rect">
             <a:avLst/>
           </a:prstGeom>
           <a:solidFill>
@@ -3382,7 +3530,7 @@
           </a:xfrm>
           <a:prstGeom prst="roundRect">
             <a:avLst>
-              <a:gd name="adj" fmla="val 25000"/>
+              <a:gd name="adj" fmla="val 50000"/>
             </a:avLst>
           </a:prstGeom>
           <a:solidFill>
@@ -3463,7 +3611,7 @@
           </a:xfrm>
           <a:prstGeom prst="roundRect">
             <a:avLst>
-              <a:gd name="adj" fmla="val 25000"/>
+              <a:gd name="adj" fmla="val 50000"/>
             </a:avLst>
           </a:prstGeom>
           <a:solidFill>
@@ -3544,7 +3692,7 @@
           </a:xfrm>
           <a:prstGeom prst="roundRect">
             <a:avLst>
-              <a:gd name="adj" fmla="val 25000"/>
+              <a:gd name="adj" fmla="val 50000"/>
             </a:avLst>
           </a:prstGeom>
           <a:solidFill>
@@ -3724,7 +3872,14 @@
           <a:bodyPr wrap="square"/>
           <a:lstStyle/>
           <a:p>
-            <a:r>
+            <a:pPr algn="r"/>
+            <a:r>
+              <a:rPr sz="900" b="0">
+                <a:solidFill>
+                  <a:srgbClr val="6B7076"/>
+                </a:solidFill>
+                <a:latin typeface="Replica LL TT"/>
+              </a:rPr>
               <a:t>Oracle AI &amp; Data Solutions</a:t>
             </a:r>
           </a:p>
@@ -3855,41 +4010,30 @@
           </a:p>
         </p:txBody>
       </p:sp>
-      <p:sp>
-        <p:nvSpPr>
-          <p:cNvPr id="7" name="TextBox 6"/>
-          <p:cNvSpPr txBox="1"/>
-          <p:nvPr/>
-        </p:nvSpPr>
-        <p:spPr>
-          <a:xfrm>
-            <a:off x="384048" y="2267712"/>
-            <a:ext cx="2057400" cy="1828800"/>
-          </a:xfrm>
-          <a:prstGeom prst="rect">
-            <a:avLst/>
-          </a:prstGeom>
-          <a:noFill/>
-        </p:spPr>
-        <p:txBody>
-          <a:bodyPr wrap="square" lIns="0" rIns="0" tIns="0" bIns="0" anchor="ctr">
-            <a:spAutoFit/>
-          </a:bodyPr>
-          <a:lstStyle/>
-          <a:p>
-            <a:pPr algn="ctr"/>
-            <a:r>
-              <a:rPr sz="4000" b="1">
-                <a:solidFill>
-                  <a:srgbClr val="FFFFFF"/>
-                </a:solidFill>
-                <a:latin typeface="Replica LL TT"/>
-              </a:rPr>
-              <a:t>1</a:t>
-            </a:r>
-          </a:p>
-        </p:txBody>
-      </p:sp>
+      <p:pic>
+        <p:nvPicPr>
+          <p:cNvPr id="7" name="Picture 6" descr="truck.png"/>
+          <p:cNvPicPr>
+            <a:picLocks noChangeAspect="1"/>
+          </p:cNvPicPr>
+          <p:nvPr/>
+        </p:nvPicPr>
+        <p:blipFill>
+          <a:blip r:embed="rId2"/>
+          <a:stretch>
+            <a:fillRect/>
+          </a:stretch>
+        </p:blipFill>
+        <p:spPr>
+          <a:xfrm>
+            <a:off x="928116" y="2697480"/>
+            <a:ext cx="969264" cy="969264"/>
+          </a:xfrm>
+          <a:prstGeom prst="rect">
+            <a:avLst/>
+          </a:prstGeom>
+        </p:spPr>
+      </p:pic>
       <p:sp>
         <p:nvSpPr>
           <p:cNvPr id="8" name="Rectangle 7"/>
@@ -4138,41 +4282,30 @@
           </a:p>
         </p:txBody>
       </p:sp>
-      <p:sp>
-        <p:nvSpPr>
-          <p:cNvPr id="14" name="TextBox 13"/>
-          <p:cNvSpPr txBox="1"/>
-          <p:nvPr/>
-        </p:nvSpPr>
-        <p:spPr>
-          <a:xfrm>
-            <a:off x="6144768" y="2267712"/>
-            <a:ext cx="2057400" cy="1828800"/>
-          </a:xfrm>
-          <a:prstGeom prst="rect">
-            <a:avLst/>
-          </a:prstGeom>
-          <a:noFill/>
-        </p:spPr>
-        <p:txBody>
-          <a:bodyPr wrap="square" lIns="0" rIns="0" tIns="0" bIns="0" anchor="ctr">
-            <a:spAutoFit/>
-          </a:bodyPr>
-          <a:lstStyle/>
-          <a:p>
-            <a:pPr algn="ctr"/>
-            <a:r>
-              <a:rPr sz="4000" b="1">
-                <a:solidFill>
-                  <a:srgbClr val="FFFFFF"/>
-                </a:solidFill>
-                <a:latin typeface="Replica LL TT"/>
-              </a:rPr>
-              <a:t>2</a:t>
-            </a:r>
-          </a:p>
-        </p:txBody>
-      </p:sp>
+      <p:pic>
+        <p:nvPicPr>
+          <p:cNvPr id="14" name="Picture 13" descr="bank.png"/>
+          <p:cNvPicPr>
+            <a:picLocks noChangeAspect="1"/>
+          </p:cNvPicPr>
+          <p:nvPr/>
+        </p:nvPicPr>
+        <p:blipFill>
+          <a:blip r:embed="rId3"/>
+          <a:stretch>
+            <a:fillRect/>
+          </a:stretch>
+        </p:blipFill>
+        <p:spPr>
+          <a:xfrm>
+            <a:off x="6688836" y="2697480"/>
+            <a:ext cx="969264" cy="969264"/>
+          </a:xfrm>
+          <a:prstGeom prst="rect">
+            <a:avLst/>
+          </a:prstGeom>
+        </p:spPr>
+      </p:pic>
       <p:sp>
         <p:nvSpPr>
           <p:cNvPr id="15" name="Rectangle 14"/>
@@ -4421,41 +4554,30 @@
           </a:p>
         </p:txBody>
       </p:sp>
-      <p:sp>
-        <p:nvSpPr>
-          <p:cNvPr id="21" name="TextBox 20"/>
-          <p:cNvSpPr txBox="1"/>
-          <p:nvPr/>
-        </p:nvSpPr>
-        <p:spPr>
-          <a:xfrm>
-            <a:off x="384048" y="4352544"/>
-            <a:ext cx="2057400" cy="1828800"/>
-          </a:xfrm>
-          <a:prstGeom prst="rect">
-            <a:avLst/>
-          </a:prstGeom>
-          <a:noFill/>
-        </p:spPr>
-        <p:txBody>
-          <a:bodyPr wrap="square" lIns="0" rIns="0" tIns="0" bIns="0" anchor="ctr">
-            <a:spAutoFit/>
-          </a:bodyPr>
-          <a:lstStyle/>
-          <a:p>
-            <a:pPr algn="ctr"/>
-            <a:r>
-              <a:rPr sz="4000" b="1">
-                <a:solidFill>
-                  <a:srgbClr val="FFFFFF"/>
-                </a:solidFill>
-                <a:latin typeface="Replica LL TT"/>
-              </a:rPr>
-              <a:t>3</a:t>
-            </a:r>
-          </a:p>
-        </p:txBody>
-      </p:sp>
+      <p:pic>
+        <p:nvPicPr>
+          <p:cNvPr id="21" name="Picture 20" descr="factory.png"/>
+          <p:cNvPicPr>
+            <a:picLocks noChangeAspect="1"/>
+          </p:cNvPicPr>
+          <p:nvPr/>
+        </p:nvPicPr>
+        <p:blipFill>
+          <a:blip r:embed="rId4"/>
+          <a:stretch>
+            <a:fillRect/>
+          </a:stretch>
+        </p:blipFill>
+        <p:spPr>
+          <a:xfrm>
+            <a:off x="928116" y="4782312"/>
+            <a:ext cx="969264" cy="969264"/>
+          </a:xfrm>
+          <a:prstGeom prst="rect">
+            <a:avLst/>
+          </a:prstGeom>
+        </p:spPr>
+      </p:pic>
       <p:sp>
         <p:nvSpPr>
           <p:cNvPr id="22" name="Rectangle 21"/>
@@ -4704,41 +4826,30 @@
           </a:p>
         </p:txBody>
       </p:sp>
-      <p:sp>
-        <p:nvSpPr>
-          <p:cNvPr id="28" name="TextBox 27"/>
-          <p:cNvSpPr txBox="1"/>
-          <p:nvPr/>
-        </p:nvSpPr>
-        <p:spPr>
-          <a:xfrm>
-            <a:off x="6144768" y="4352544"/>
-            <a:ext cx="2057400" cy="1828800"/>
-          </a:xfrm>
-          <a:prstGeom prst="rect">
-            <a:avLst/>
-          </a:prstGeom>
-          <a:noFill/>
-        </p:spPr>
-        <p:txBody>
-          <a:bodyPr wrap="square" lIns="0" rIns="0" tIns="0" bIns="0" anchor="ctr">
-            <a:spAutoFit/>
-          </a:bodyPr>
-          <a:lstStyle/>
-          <a:p>
-            <a:pPr algn="ctr"/>
-            <a:r>
-              <a:rPr sz="4000" b="1">
-                <a:solidFill>
-                  <a:srgbClr val="FFFFFF"/>
-                </a:solidFill>
-                <a:latin typeface="Replica LL TT"/>
-              </a:rPr>
-              <a:t>4</a:t>
-            </a:r>
-          </a:p>
-        </p:txBody>
-      </p:sp>
+      <p:pic>
+        <p:nvPicPr>
+          <p:cNvPr id="28" name="Picture 27" descr="generic.png"/>
+          <p:cNvPicPr>
+            <a:picLocks noChangeAspect="1"/>
+          </p:cNvPicPr>
+          <p:nvPr/>
+        </p:nvPicPr>
+        <p:blipFill>
+          <a:blip r:embed="rId5"/>
+          <a:stretch>
+            <a:fillRect/>
+          </a:stretch>
+        </p:blipFill>
+        <p:spPr>
+          <a:xfrm>
+            <a:off x="6688836" y="4782312"/>
+            <a:ext cx="969264" cy="969264"/>
+          </a:xfrm>
+          <a:prstGeom prst="rect">
+            <a:avLst/>
+          </a:prstGeom>
+        </p:spPr>
+      </p:pic>
       <p:sp>
         <p:nvSpPr>
           <p:cNvPr id="29" name="Rectangle 28"/>
@@ -4930,7 +5041,14 @@
           <a:bodyPr wrap="square"/>
           <a:lstStyle/>
           <a:p>
-            <a:r>
+            <a:pPr algn="r"/>
+            <a:r>
+              <a:rPr sz="900" b="0">
+                <a:solidFill>
+                  <a:srgbClr val="6B7076"/>
+                </a:solidFill>
+                <a:latin typeface="Replica LL TT"/>
+              </a:rPr>
               <a:t>Oracle AI &amp; Data Solutions</a:t>
             </a:r>
           </a:p>
@@ -5232,7 +5350,7 @@
                 </a:solidFill>
                 <a:latin typeface="Replica LL TT"/>
               </a:rPr>
-              <a:t>Before: the manual artefact</a:t>
+              <a:t>image to be chosen</a:t>
             </a:r>
           </a:p>
         </p:txBody>
@@ -5428,7 +5546,7 @@
                 </a:solidFill>
                 <a:latin typeface="Replica LL TT"/>
               </a:rPr>
-              <a:t>After: the product screen</a:t>
+              <a:t>image to be chosen</a:t>
             </a:r>
           </a:p>
         </p:txBody>
@@ -5466,7 +5584,14 @@
           <a:bodyPr wrap="square"/>
           <a:lstStyle/>
           <a:p>
-            <a:r>
+            <a:pPr algn="r"/>
+            <a:r>
+              <a:rPr sz="900" b="0">
+                <a:solidFill>
+                  <a:srgbClr val="6B7076"/>
+                </a:solidFill>
+                <a:latin typeface="Replica LL TT"/>
+              </a:rPr>
               <a:t>Oracle AI &amp; Data Solutions</a:t>
             </a:r>
           </a:p>
@@ -7204,7 +7329,14 @@
           <a:bodyPr wrap="square"/>
           <a:lstStyle/>
           <a:p>
-            <a:r>
+            <a:pPr algn="r"/>
+            <a:r>
+              <a:rPr sz="900" b="0">
+                <a:solidFill>
+                  <a:srgbClr val="6B7076"/>
+                </a:solidFill>
+                <a:latin typeface="Replica LL TT"/>
+              </a:rPr>
               <a:t>Oracle AI &amp; Data Solutions</a:t>
             </a:r>
           </a:p>
@@ -7989,7 +8121,14 @@
           <a:bodyPr wrap="square"/>
           <a:lstStyle/>
           <a:p>
-            <a:r>
+            <a:pPr algn="r"/>
+            <a:r>
+              <a:rPr sz="900" b="0">
+                <a:solidFill>
+                  <a:srgbClr val="6B7076"/>
+                </a:solidFill>
+                <a:latin typeface="Replica LL TT"/>
+              </a:rPr>
               <a:t>Oracle AI &amp; Data Solutions</a:t>
             </a:r>
           </a:p>
@@ -8146,7 +8285,7 @@
       </p:sp>
       <p:sp>
         <p:nvSpPr>
-          <p:cNvPr id="8" name="Rounded Rectangle 7"/>
+          <p:cNvPr id="8" name="Rectangle 7"/>
           <p:cNvSpPr/>
           <p:nvPr/>
         </p:nvSpPr>
@@ -8155,7 +8294,7 @@
             <a:off x="868680" y="2542032"/>
             <a:ext cx="10469880" cy="704088"/>
           </a:xfrm>
-          <a:prstGeom prst="roundRect">
+          <a:prstGeom prst="rect">
             <a:avLst/>
           </a:prstGeom>
           <a:solidFill>
@@ -8361,7 +8500,7 @@
           </a:xfrm>
           <a:prstGeom prst="roundRect">
             <a:avLst>
-              <a:gd name="adj" fmla="val 25000"/>
+              <a:gd name="adj" fmla="val 50000"/>
             </a:avLst>
           </a:prstGeom>
           <a:solidFill>
@@ -8431,7 +8570,7 @@
       </p:sp>
       <p:sp>
         <p:nvSpPr>
-          <p:cNvPr id="15" name="Rounded Rectangle 14"/>
+          <p:cNvPr id="15" name="Rectangle 14"/>
           <p:cNvSpPr/>
           <p:nvPr/>
         </p:nvSpPr>
@@ -8440,7 +8579,7 @@
             <a:off x="868680" y="3374136"/>
             <a:ext cx="10469880" cy="704088"/>
           </a:xfrm>
-          <a:prstGeom prst="roundRect">
+          <a:prstGeom prst="rect">
             <a:avLst/>
           </a:prstGeom>
           <a:solidFill>
@@ -8646,7 +8785,7 @@
           </a:xfrm>
           <a:prstGeom prst="roundRect">
             <a:avLst>
-              <a:gd name="adj" fmla="val 25000"/>
+              <a:gd name="adj" fmla="val 50000"/>
             </a:avLst>
           </a:prstGeom>
           <a:solidFill>
@@ -8716,7 +8855,7 @@
       </p:sp>
       <p:sp>
         <p:nvSpPr>
-          <p:cNvPr id="22" name="Rounded Rectangle 21"/>
+          <p:cNvPr id="22" name="Rectangle 21"/>
           <p:cNvSpPr/>
           <p:nvPr/>
         </p:nvSpPr>
@@ -8725,7 +8864,7 @@
             <a:off x="868680" y="4206240"/>
             <a:ext cx="10469880" cy="704088"/>
           </a:xfrm>
-          <a:prstGeom prst="roundRect">
+          <a:prstGeom prst="rect">
             <a:avLst/>
           </a:prstGeom>
           <a:solidFill>
@@ -8931,7 +9070,7 @@
           </a:xfrm>
           <a:prstGeom prst="roundRect">
             <a:avLst>
-              <a:gd name="adj" fmla="val 25000"/>
+              <a:gd name="adj" fmla="val 50000"/>
             </a:avLst>
           </a:prstGeom>
           <a:solidFill>
@@ -9001,7 +9140,7 @@
       </p:sp>
       <p:sp>
         <p:nvSpPr>
-          <p:cNvPr id="29" name="Rounded Rectangle 28"/>
+          <p:cNvPr id="29" name="Rectangle 28"/>
           <p:cNvSpPr/>
           <p:nvPr/>
         </p:nvSpPr>
@@ -9010,7 +9149,7 @@
             <a:off x="868680" y="5038344"/>
             <a:ext cx="10469880" cy="704088"/>
           </a:xfrm>
-          <a:prstGeom prst="roundRect">
+          <a:prstGeom prst="rect">
             <a:avLst/>
           </a:prstGeom>
           <a:solidFill>
@@ -9216,7 +9355,7 @@
           </a:xfrm>
           <a:prstGeom prst="roundRect">
             <a:avLst>
-              <a:gd name="adj" fmla="val 25000"/>
+              <a:gd name="adj" fmla="val 50000"/>
             </a:avLst>
           </a:prstGeom>
           <a:solidFill>
@@ -9317,7 +9456,14 @@
           <a:bodyPr wrap="square"/>
           <a:lstStyle/>
           <a:p>
-            <a:r>
+            <a:pPr algn="r"/>
+            <a:r>
+              <a:rPr sz="900" b="0">
+                <a:solidFill>
+                  <a:srgbClr val="6B7076"/>
+                </a:solidFill>
+                <a:latin typeface="Replica LL TT"/>
+              </a:rPr>
               <a:t>Oracle AI &amp; Data Solutions</a:t>
             </a:r>
           </a:p>
@@ -9395,213 +9541,17 @@
       </p:sp>
       <p:sp>
         <p:nvSpPr>
-          <p:cNvPr id="6" name="Rounded Rectangle 5"/>
+          <p:cNvPr id="6" name="Rectangle 5"/>
           <p:cNvSpPr/>
           <p:nvPr/>
         </p:nvSpPr>
         <p:spPr>
           <a:xfrm>
-            <a:off x="502920" y="2468880"/>
-            <a:ext cx="2697480" cy="1280160"/>
-          </a:xfrm>
-          <a:prstGeom prst="roundRect">
-            <a:avLst>
-              <a:gd name="adj" fmla="val 10000"/>
-            </a:avLst>
-          </a:prstGeom>
-          <a:solidFill>
-            <a:srgbClr val="1485C3"/>
-          </a:solidFill>
-          <a:ln>
-            <a:noFill/>
-          </a:ln>
-          <a:effectLst/>
-        </p:spPr>
-        <p:style>
-          <a:lnRef idx="1">
-            <a:schemeClr val="accent1"/>
-          </a:lnRef>
-          <a:fillRef idx="3">
-            <a:schemeClr val="accent1"/>
-          </a:fillRef>
-          <a:effectRef idx="2">
-            <a:schemeClr val="accent1"/>
-          </a:effectRef>
-          <a:fontRef idx="minor">
-            <a:schemeClr val="lt1"/>
-          </a:fontRef>
-        </p:style>
-        <p:txBody>
-          <a:bodyPr rtlCol="0" anchor="ctr" wrap="square"/>
-          <a:lstStyle/>
-          <a:p>
-            <a:pPr algn="ctr"/>
-          </a:p>
-        </p:txBody>
-      </p:sp>
-      <p:sp>
-        <p:nvSpPr>
-          <p:cNvPr id="7" name="TextBox 6"/>
-          <p:cNvSpPr txBox="1"/>
-          <p:nvPr/>
-        </p:nvSpPr>
-        <p:spPr>
-          <a:xfrm>
-            <a:off x="640080" y="2468880"/>
-            <a:ext cx="2423160" cy="1280160"/>
-          </a:xfrm>
-          <a:prstGeom prst="rect">
-            <a:avLst/>
-          </a:prstGeom>
-          <a:noFill/>
-        </p:spPr>
-        <p:txBody>
-          <a:bodyPr wrap="square" lIns="0" rIns="0" tIns="0" bIns="0" anchor="ctr">
-            <a:spAutoFit/>
-          </a:bodyPr>
-          <a:lstStyle/>
-          <a:p>
-            <a:pPr algn="ctr"/>
-            <a:r>
-              <a:rPr sz="1350" b="1">
-                <a:solidFill>
-                  <a:srgbClr val="FFFFFF"/>
-                </a:solidFill>
-                <a:latin typeface="Replica LL TT"/>
-              </a:rPr>
-              <a:t>Signal feeds</a:t>
-            </a:r>
-          </a:p>
-          <a:p>
-            <a:pPr algn="ctr">
-              <a:spcBef>
-                <a:spcPts val="300"/>
-              </a:spcBef>
-            </a:pPr>
-            <a:r>
-              <a:rPr sz="950" b="0">
-                <a:solidFill>
-                  <a:srgbClr val="FFFFFF"/>
-                </a:solidFill>
-                <a:latin typeface="Replica LL TT"/>
-              </a:rPr>
-              <a:t>news, filings, disclosures, commercial data feeds</a:t>
-            </a:r>
-          </a:p>
-        </p:txBody>
-      </p:sp>
-      <p:sp>
-        <p:nvSpPr>
-          <p:cNvPr id="8" name="Rounded Rectangle 7"/>
-          <p:cNvSpPr/>
-          <p:nvPr/>
-        </p:nvSpPr>
-        <p:spPr>
-          <a:xfrm>
-            <a:off x="502920" y="4023360"/>
-            <a:ext cx="2697480" cy="1280160"/>
-          </a:xfrm>
-          <a:prstGeom prst="roundRect">
-            <a:avLst>
-              <a:gd name="adj" fmla="val 10000"/>
-            </a:avLst>
-          </a:prstGeom>
-          <a:solidFill>
-            <a:srgbClr val="1485C3"/>
-          </a:solidFill>
-          <a:ln>
-            <a:noFill/>
-          </a:ln>
-          <a:effectLst/>
-        </p:spPr>
-        <p:style>
-          <a:lnRef idx="1">
-            <a:schemeClr val="accent1"/>
-          </a:lnRef>
-          <a:fillRef idx="3">
-            <a:schemeClr val="accent1"/>
-          </a:fillRef>
-          <a:effectRef idx="2">
-            <a:schemeClr val="accent1"/>
-          </a:effectRef>
-          <a:fontRef idx="minor">
-            <a:schemeClr val="lt1"/>
-          </a:fontRef>
-        </p:style>
-        <p:txBody>
-          <a:bodyPr rtlCol="0" anchor="ctr" wrap="square"/>
-          <a:lstStyle/>
-          <a:p>
-            <a:pPr algn="ctr"/>
-          </a:p>
-        </p:txBody>
-      </p:sp>
-      <p:sp>
-        <p:nvSpPr>
-          <p:cNvPr id="9" name="TextBox 8"/>
-          <p:cNvSpPr txBox="1"/>
-          <p:nvPr/>
-        </p:nvSpPr>
-        <p:spPr>
-          <a:xfrm>
-            <a:off x="640080" y="4023360"/>
-            <a:ext cx="2423160" cy="1280160"/>
-          </a:xfrm>
-          <a:prstGeom prst="rect">
-            <a:avLst/>
-          </a:prstGeom>
-          <a:noFill/>
-        </p:spPr>
-        <p:txBody>
-          <a:bodyPr wrap="square" lIns="0" rIns="0" tIns="0" bIns="0" anchor="ctr">
-            <a:spAutoFit/>
-          </a:bodyPr>
-          <a:lstStyle/>
-          <a:p>
-            <a:pPr algn="ctr"/>
-            <a:r>
-              <a:rPr sz="1350" b="1">
-                <a:solidFill>
-                  <a:srgbClr val="FFFFFF"/>
-                </a:solidFill>
-                <a:latin typeface="Replica LL TT"/>
-              </a:rPr>
-              <a:t>Organization context</a:t>
-            </a:r>
-          </a:p>
-          <a:p>
-            <a:pPr algn="ctr">
-              <a:spcBef>
-                <a:spcPts val="300"/>
-              </a:spcBef>
-            </a:pPr>
-            <a:r>
-              <a:rPr sz="950" b="0">
-                <a:solidFill>
-                  <a:srgbClr val="FFFFFF"/>
-                </a:solidFill>
-                <a:latin typeface="Replica LL TT"/>
-              </a:rPr>
-              <a:t>records and framing from the system of record, the catalog of moves</a:t>
-            </a:r>
-          </a:p>
-        </p:txBody>
-      </p:sp>
-      <p:sp>
-        <p:nvSpPr>
-          <p:cNvPr id="10" name="Rounded Rectangle 9"/>
-          <p:cNvSpPr/>
-          <p:nvPr/>
-        </p:nvSpPr>
-        <p:spPr>
-          <a:xfrm>
-            <a:off x="4901184" y="2331720"/>
-            <a:ext cx="6684264" cy="3383280"/>
-          </a:xfrm>
-          <a:prstGeom prst="roundRect">
-            <a:avLst>
-              <a:gd name="adj" fmla="val 4000"/>
-            </a:avLst>
+            <a:off x="3822192" y="2395728"/>
+            <a:ext cx="4590288" cy="3346704"/>
+          </a:xfrm>
+          <a:prstGeom prst="rect">
+            <a:avLst/>
           </a:prstGeom>
           <a:solidFill>
             <a:srgbClr val="FFFFFF"/>
@@ -9637,19 +9587,17 @@
       </p:sp>
       <p:sp>
         <p:nvSpPr>
-          <p:cNvPr id="11" name="Rounded Rectangle 10"/>
+          <p:cNvPr id="7" name="Rectangle 6"/>
           <p:cNvSpPr/>
           <p:nvPr/>
         </p:nvSpPr>
         <p:spPr>
           <a:xfrm>
-            <a:off x="5285232" y="2715768"/>
-            <a:ext cx="5916168" cy="841248"/>
-          </a:xfrm>
-          <a:prstGeom prst="roundRect">
-            <a:avLst>
-              <a:gd name="adj" fmla="val 10000"/>
-            </a:avLst>
+            <a:off x="4096512" y="2761488"/>
+            <a:ext cx="4041648" cy="896112"/>
+          </a:xfrm>
+          <a:prstGeom prst="rect">
+            <a:avLst/>
           </a:prstGeom>
           <a:solidFill>
             <a:srgbClr val="1485C3"/>
@@ -9683,14 +9631,14 @@
       </p:sp>
       <p:sp>
         <p:nvSpPr>
-          <p:cNvPr id="12" name="TextBox 11"/>
+          <p:cNvPr id="8" name="TextBox 7"/>
           <p:cNvSpPr txBox="1"/>
           <p:nvPr/>
         </p:nvSpPr>
         <p:spPr>
           <a:xfrm>
-            <a:off x="5449824" y="2715768"/>
-            <a:ext cx="5586984" cy="841248"/>
+            <a:off x="4261104" y="2761488"/>
+            <a:ext cx="3712464" cy="896112"/>
           </a:xfrm>
           <a:prstGeom prst="rect">
             <a:avLst/>
@@ -9711,7 +9659,7 @@
                 </a:solidFill>
                 <a:latin typeface="Replica LL TT"/>
               </a:rPr>
-              <a:t>Account insights by SoftServe (application)</a:t>
+              <a:t>Account insights by SoftServe</a:t>
             </a:r>
           </a:p>
           <a:p>
@@ -9727,26 +9675,24 @@
                 </a:solidFill>
                 <a:latin typeface="Replica LL TT"/>
               </a:rPr>
-              <a:t>normalize · fan out · reason · map · score · reviewer UI</a:t>
-            </a:r>
-          </a:p>
-        </p:txBody>
-      </p:sp>
-      <p:sp>
-        <p:nvSpPr>
-          <p:cNvPr id="13" name="Rounded Rectangle 12"/>
+              <a:t>Signal normalization and account resolution, Catalog mapping and ripple reasoning, Magnitude and confidence scoring, Reviewer UI and evaluation harness</a:t>
+            </a:r>
+          </a:p>
+        </p:txBody>
+      </p:sp>
+      <p:sp>
+        <p:nvSpPr>
+          <p:cNvPr id="9" name="Rectangle 8"/>
           <p:cNvSpPr/>
           <p:nvPr/>
         </p:nvSpPr>
         <p:spPr>
           <a:xfrm>
-            <a:off x="5285232" y="3767328"/>
-            <a:ext cx="5916168" cy="841248"/>
-          </a:xfrm>
-          <a:prstGeom prst="roundRect">
-            <a:avLst>
-              <a:gd name="adj" fmla="val 10000"/>
-            </a:avLst>
+            <a:off x="4096512" y="3877056"/>
+            <a:ext cx="4041648" cy="896112"/>
+          </a:xfrm>
+          <a:prstGeom prst="rect">
+            <a:avLst/>
           </a:prstGeom>
           <a:solidFill>
             <a:srgbClr val="F4F6F7"/>
@@ -9780,14 +9726,14 @@
       </p:sp>
       <p:sp>
         <p:nvSpPr>
-          <p:cNvPr id="14" name="TextBox 13"/>
+          <p:cNvPr id="10" name="TextBox 9"/>
           <p:cNvSpPr txBox="1"/>
           <p:nvPr/>
         </p:nvSpPr>
         <p:spPr>
           <a:xfrm>
-            <a:off x="5449824" y="3767328"/>
-            <a:ext cx="5586984" cy="841248"/>
+            <a:off x="4261104" y="3877056"/>
+            <a:ext cx="3712464" cy="896112"/>
           </a:xfrm>
           <a:prstGeom prst="rect">
             <a:avLst/>
@@ -9808,7 +9754,7 @@
                 </a:solidFill>
                 <a:latin typeface="Replica LL TT"/>
               </a:rPr>
-              <a:t>NVIDIA AI-Q agentic engine</a:t>
+              <a:t>NVIDIA AI-Q Blueprint</a:t>
             </a:r>
           </a:p>
           <a:p>
@@ -9824,21 +9770,21 @@
                 </a:solidFill>
                 <a:latin typeface="Replica LL TT"/>
               </a:rPr>
-              <a:t>Agentic orchestration and deep research, Retrieval, reranking and citation verification</a:t>
-            </a:r>
-          </a:p>
-        </p:txBody>
-      </p:sp>
-      <p:sp>
-        <p:nvSpPr>
-          <p:cNvPr id="15" name="TextBox 14"/>
+              <a:t>NVIDIA AI-Q agentic engine</a:t>
+            </a:r>
+          </a:p>
+        </p:txBody>
+      </p:sp>
+      <p:sp>
+        <p:nvSpPr>
+          <p:cNvPr id="11" name="TextBox 10"/>
           <p:cNvSpPr txBox="1"/>
           <p:nvPr/>
         </p:nvSpPr>
         <p:spPr>
           <a:xfrm>
-            <a:off x="5285232" y="4873752"/>
-            <a:ext cx="5916168" cy="685800"/>
+            <a:off x="4096512" y="4937760"/>
+            <a:ext cx="4041648" cy="731520"/>
           </a:xfrm>
           <a:prstGeom prst="rect">
             <a:avLst/>
@@ -9853,7 +9799,7 @@
           <a:p>
             <a:pPr algn="l"/>
             <a:r>
-              <a:rPr sz="1288" b="1">
+              <a:rPr sz="1120" b="1">
                 <a:solidFill>
                   <a:srgbClr val="26282B"/>
                 </a:solidFill>
@@ -9869,7 +9815,7 @@
               </a:spcBef>
             </a:pPr>
             <a:r>
-              <a:rPr sz="966" b="0">
+              <a:rPr sz="840" b="0">
                 <a:solidFill>
                   <a:srgbClr val="6B7076"/>
                 </a:solidFill>
@@ -9882,16 +9828,16 @@
       </p:sp>
       <p:sp>
         <p:nvSpPr>
-          <p:cNvPr id="16" name="Right Arrow 15"/>
+          <p:cNvPr id="12" name="Rectangle 11"/>
           <p:cNvSpPr/>
           <p:nvPr/>
         </p:nvSpPr>
         <p:spPr>
           <a:xfrm>
-            <a:off x="3310128" y="2834640"/>
-            <a:ext cx="1463040" cy="100584"/>
-          </a:xfrm>
-          <a:prstGeom prst="rightArrow">
+            <a:off x="384048" y="2395728"/>
+            <a:ext cx="2331720" cy="1536192"/>
+          </a:xfrm>
+          <a:prstGeom prst="rect">
             <a:avLst/>
           </a:prstGeom>
           <a:solidFill>
@@ -9917,7 +9863,7 @@
           </a:fontRef>
         </p:style>
         <p:txBody>
-          <a:bodyPr rtlCol="0" anchor="ctr"/>
+          <a:bodyPr rtlCol="0" anchor="ctr" wrap="square"/>
           <a:lstStyle/>
           <a:p>
             <a:pPr algn="ctr"/>
@@ -9926,14 +9872,14 @@
       </p:sp>
       <p:sp>
         <p:nvSpPr>
-          <p:cNvPr id="17" name="TextBox 16"/>
+          <p:cNvPr id="13" name="TextBox 12"/>
           <p:cNvSpPr txBox="1"/>
           <p:nvPr/>
         </p:nvSpPr>
         <p:spPr>
           <a:xfrm>
-            <a:off x="3246120" y="2432304"/>
-            <a:ext cx="1609344" cy="365760"/>
+            <a:off x="530352" y="2395728"/>
+            <a:ext cx="2039112" cy="1536192"/>
           </a:xfrm>
           <a:prstGeom prst="rect">
             <a:avLst/>
@@ -9941,40 +9887,40 @@
           <a:noFill/>
         </p:spPr>
         <p:txBody>
-          <a:bodyPr wrap="square" lIns="0" rIns="0" tIns="0" bIns="0" anchor="b">
+          <a:bodyPr wrap="square" lIns="0" rIns="0" tIns="0" bIns="0" anchor="ctr">
             <a:spAutoFit/>
           </a:bodyPr>
           <a:lstStyle/>
           <a:p>
             <a:pPr algn="ctr"/>
             <a:r>
-              <a:rPr sz="850" b="0">
-                <a:solidFill>
-                  <a:srgbClr val="6B7076"/>
+              <a:rPr sz="1350" b="1">
+                <a:solidFill>
+                  <a:srgbClr val="FFFFFF"/>
                 </a:solidFill>
                 <a:latin typeface="Replica LL TT"/>
               </a:rPr>
-              <a:t>news, filings, disclosures, commercial data feeds</a:t>
-            </a:r>
-          </a:p>
-        </p:txBody>
-      </p:sp>
-      <p:sp>
-        <p:nvSpPr>
-          <p:cNvPr id="18" name="Left Arrow 17"/>
+              <a:t>Signal feeds</a:t>
+            </a:r>
+          </a:p>
+        </p:txBody>
+      </p:sp>
+      <p:sp>
+        <p:nvSpPr>
+          <p:cNvPr id="14" name="Rectangle 13"/>
           <p:cNvSpPr/>
           <p:nvPr/>
         </p:nvSpPr>
         <p:spPr>
           <a:xfrm>
-            <a:off x="3310128" y="3401568"/>
-            <a:ext cx="1463040" cy="100584"/>
-          </a:xfrm>
-          <a:prstGeom prst="leftArrow">
+            <a:off x="384048" y="4206240"/>
+            <a:ext cx="2331720" cy="1536192"/>
+          </a:xfrm>
+          <a:prstGeom prst="rect">
             <a:avLst/>
           </a:prstGeom>
           <a:solidFill>
-            <a:srgbClr val="6DB2E2"/>
+            <a:srgbClr val="1485C3"/>
           </a:solidFill>
           <a:ln>
             <a:noFill/>
@@ -9996,6 +9942,164 @@
           </a:fontRef>
         </p:style>
         <p:txBody>
+          <a:bodyPr rtlCol="0" anchor="ctr" wrap="square"/>
+          <a:lstStyle/>
+          <a:p>
+            <a:pPr algn="ctr"/>
+          </a:p>
+        </p:txBody>
+      </p:sp>
+      <p:sp>
+        <p:nvSpPr>
+          <p:cNvPr id="15" name="TextBox 14"/>
+          <p:cNvSpPr txBox="1"/>
+          <p:nvPr/>
+        </p:nvSpPr>
+        <p:spPr>
+          <a:xfrm>
+            <a:off x="530352" y="4206240"/>
+            <a:ext cx="2039112" cy="1536192"/>
+          </a:xfrm>
+          <a:prstGeom prst="rect">
+            <a:avLst/>
+          </a:prstGeom>
+          <a:noFill/>
+        </p:spPr>
+        <p:txBody>
+          <a:bodyPr wrap="square" lIns="0" rIns="0" tIns="0" bIns="0" anchor="ctr">
+            <a:spAutoFit/>
+          </a:bodyPr>
+          <a:lstStyle/>
+          <a:p>
+            <a:pPr algn="ctr"/>
+            <a:r>
+              <a:rPr sz="1350" b="1">
+                <a:solidFill>
+                  <a:srgbClr val="FFFFFF"/>
+                </a:solidFill>
+                <a:latin typeface="Replica LL TT"/>
+              </a:rPr>
+              <a:t>Organization context</a:t>
+            </a:r>
+          </a:p>
+        </p:txBody>
+      </p:sp>
+      <p:sp>
+        <p:nvSpPr>
+          <p:cNvPr id="16" name="Right Arrow 15"/>
+          <p:cNvSpPr/>
+          <p:nvPr/>
+        </p:nvSpPr>
+        <p:spPr>
+          <a:xfrm>
+            <a:off x="2798064" y="3113532"/>
+            <a:ext cx="1024128" cy="100584"/>
+          </a:xfrm>
+          <a:prstGeom prst="rightArrow">
+            <a:avLst/>
+          </a:prstGeom>
+          <a:solidFill>
+            <a:srgbClr val="1485C3"/>
+          </a:solidFill>
+          <a:ln>
+            <a:noFill/>
+          </a:ln>
+          <a:effectLst/>
+        </p:spPr>
+        <p:style>
+          <a:lnRef idx="1">
+            <a:schemeClr val="accent1"/>
+          </a:lnRef>
+          <a:fillRef idx="3">
+            <a:schemeClr val="accent1"/>
+          </a:fillRef>
+          <a:effectRef idx="2">
+            <a:schemeClr val="accent1"/>
+          </a:effectRef>
+          <a:fontRef idx="minor">
+            <a:schemeClr val="lt1"/>
+          </a:fontRef>
+        </p:style>
+        <p:txBody>
+          <a:bodyPr rtlCol="0" anchor="ctr"/>
+          <a:lstStyle/>
+          <a:p>
+            <a:pPr algn="ctr"/>
+          </a:p>
+        </p:txBody>
+      </p:sp>
+      <p:sp>
+        <p:nvSpPr>
+          <p:cNvPr id="17" name="TextBox 16"/>
+          <p:cNvSpPr txBox="1"/>
+          <p:nvPr/>
+        </p:nvSpPr>
+        <p:spPr>
+          <a:xfrm>
+            <a:off x="2798064" y="2345436"/>
+            <a:ext cx="1024128" cy="713232"/>
+          </a:xfrm>
+          <a:prstGeom prst="rect">
+            <a:avLst/>
+          </a:prstGeom>
+          <a:noFill/>
+        </p:spPr>
+        <p:txBody>
+          <a:bodyPr wrap="square" lIns="0" rIns="0" tIns="0" bIns="0" anchor="b">
+            <a:spAutoFit/>
+          </a:bodyPr>
+          <a:lstStyle/>
+          <a:p>
+            <a:pPr algn="ctr"/>
+            <a:r>
+              <a:rPr sz="850" b="0">
+                <a:solidFill>
+                  <a:srgbClr val="6B7076"/>
+                </a:solidFill>
+                <a:latin typeface="Replica LL TT"/>
+              </a:rPr>
+              <a:t>news, filings, disclosures, commercial data feeds</a:t>
+            </a:r>
+          </a:p>
+        </p:txBody>
+      </p:sp>
+      <p:sp>
+        <p:nvSpPr>
+          <p:cNvPr id="18" name="Right Arrow 17"/>
+          <p:cNvSpPr/>
+          <p:nvPr/>
+        </p:nvSpPr>
+        <p:spPr>
+          <a:xfrm>
+            <a:off x="2798064" y="4924044"/>
+            <a:ext cx="1024128" cy="100584"/>
+          </a:xfrm>
+          <a:prstGeom prst="rightArrow">
+            <a:avLst/>
+          </a:prstGeom>
+          <a:solidFill>
+            <a:srgbClr val="1485C3"/>
+          </a:solidFill>
+          <a:ln>
+            <a:noFill/>
+          </a:ln>
+          <a:effectLst/>
+        </p:spPr>
+        <p:style>
+          <a:lnRef idx="1">
+            <a:schemeClr val="accent1"/>
+          </a:lnRef>
+          <a:fillRef idx="3">
+            <a:schemeClr val="accent1"/>
+          </a:fillRef>
+          <a:effectRef idx="2">
+            <a:schemeClr val="accent1"/>
+          </a:effectRef>
+          <a:fontRef idx="minor">
+            <a:schemeClr val="lt1"/>
+          </a:fontRef>
+        </p:style>
+        <p:txBody>
           <a:bodyPr rtlCol="0" anchor="ctr"/>
           <a:lstStyle/>
           <a:p>
@@ -10011,8 +10115,8 @@
         </p:nvSpPr>
         <p:spPr>
           <a:xfrm>
-            <a:off x="3246120" y="3547872"/>
-            <a:ext cx="1609344" cy="420624"/>
+            <a:off x="2798064" y="4155948"/>
+            <a:ext cx="1024128" cy="713232"/>
           </a:xfrm>
           <a:prstGeom prst="rect">
             <a:avLst/>
@@ -10020,7 +10124,7 @@
           <a:noFill/>
         </p:spPr>
         <p:txBody>
-          <a:bodyPr wrap="square" lIns="0" rIns="0" tIns="0" bIns="0" anchor="t">
+          <a:bodyPr wrap="square" lIns="0" rIns="0" tIns="0" bIns="0" anchor="b">
             <a:spAutoFit/>
           </a:bodyPr>
           <a:lstStyle/>
@@ -10033,6 +10137,164 @@
                 </a:solidFill>
                 <a:latin typeface="Replica LL TT"/>
               </a:rPr>
+              <a:t>records and framing from the system of record, the catalog of moves</a:t>
+            </a:r>
+          </a:p>
+        </p:txBody>
+      </p:sp>
+      <p:sp>
+        <p:nvSpPr>
+          <p:cNvPr id="20" name="Rectangle 19"/>
+          <p:cNvSpPr/>
+          <p:nvPr/>
+        </p:nvSpPr>
+        <p:spPr>
+          <a:xfrm>
+            <a:off x="9518904" y="2432304"/>
+            <a:ext cx="2286000" cy="1554480"/>
+          </a:xfrm>
+          <a:prstGeom prst="rect">
+            <a:avLst/>
+          </a:prstGeom>
+          <a:solidFill>
+            <a:srgbClr val="1485C3"/>
+          </a:solidFill>
+          <a:ln>
+            <a:noFill/>
+          </a:ln>
+          <a:effectLst/>
+        </p:spPr>
+        <p:style>
+          <a:lnRef idx="1">
+            <a:schemeClr val="accent1"/>
+          </a:lnRef>
+          <a:fillRef idx="3">
+            <a:schemeClr val="accent1"/>
+          </a:fillRef>
+          <a:effectRef idx="2">
+            <a:schemeClr val="accent1"/>
+          </a:effectRef>
+          <a:fontRef idx="minor">
+            <a:schemeClr val="lt1"/>
+          </a:fontRef>
+        </p:style>
+        <p:txBody>
+          <a:bodyPr rtlCol="0" anchor="ctr" wrap="square"/>
+          <a:lstStyle/>
+          <a:p>
+            <a:pPr algn="ctr"/>
+          </a:p>
+        </p:txBody>
+      </p:sp>
+      <p:sp>
+        <p:nvSpPr>
+          <p:cNvPr id="21" name="TextBox 20"/>
+          <p:cNvSpPr txBox="1"/>
+          <p:nvPr/>
+        </p:nvSpPr>
+        <p:spPr>
+          <a:xfrm>
+            <a:off x="9665208" y="2432304"/>
+            <a:ext cx="1993392" cy="1554480"/>
+          </a:xfrm>
+          <a:prstGeom prst="rect">
+            <a:avLst/>
+          </a:prstGeom>
+          <a:noFill/>
+        </p:spPr>
+        <p:txBody>
+          <a:bodyPr wrap="square" lIns="0" rIns="0" tIns="0" bIns="0" anchor="ctr">
+            <a:spAutoFit/>
+          </a:bodyPr>
+          <a:lstStyle/>
+          <a:p>
+            <a:pPr algn="ctr"/>
+            <a:r>
+              <a:rPr sz="1350" b="1">
+                <a:solidFill>
+                  <a:srgbClr val="FFFFFF"/>
+                </a:solidFill>
+                <a:latin typeface="Replica LL TT"/>
+              </a:rPr>
+              <a:t>Any CRM or CX platform — Oracle Customer Experience (CX) included</a:t>
+            </a:r>
+          </a:p>
+        </p:txBody>
+      </p:sp>
+      <p:sp>
+        <p:nvSpPr>
+          <p:cNvPr id="22" name="Right Arrow 21"/>
+          <p:cNvSpPr/>
+          <p:nvPr/>
+        </p:nvSpPr>
+        <p:spPr>
+          <a:xfrm>
+            <a:off x="8494776" y="3159252"/>
+            <a:ext cx="1024128" cy="100584"/>
+          </a:xfrm>
+          <a:prstGeom prst="rightArrow">
+            <a:avLst/>
+          </a:prstGeom>
+          <a:solidFill>
+            <a:srgbClr val="1485C3"/>
+          </a:solidFill>
+          <a:ln>
+            <a:noFill/>
+          </a:ln>
+          <a:effectLst/>
+        </p:spPr>
+        <p:style>
+          <a:lnRef idx="1">
+            <a:schemeClr val="accent1"/>
+          </a:lnRef>
+          <a:fillRef idx="3">
+            <a:schemeClr val="accent1"/>
+          </a:fillRef>
+          <a:effectRef idx="2">
+            <a:schemeClr val="accent1"/>
+          </a:effectRef>
+          <a:fontRef idx="minor">
+            <a:schemeClr val="lt1"/>
+          </a:fontRef>
+        </p:style>
+        <p:txBody>
+          <a:bodyPr rtlCol="0" anchor="ctr"/>
+          <a:lstStyle/>
+          <a:p>
+            <a:pPr algn="ctr"/>
+          </a:p>
+        </p:txBody>
+      </p:sp>
+      <p:sp>
+        <p:nvSpPr>
+          <p:cNvPr id="23" name="TextBox 22"/>
+          <p:cNvSpPr txBox="1"/>
+          <p:nvPr/>
+        </p:nvSpPr>
+        <p:spPr>
+          <a:xfrm>
+            <a:off x="8494776" y="2414016"/>
+            <a:ext cx="1024128" cy="690372"/>
+          </a:xfrm>
+          <a:prstGeom prst="rect">
+            <a:avLst/>
+          </a:prstGeom>
+          <a:noFill/>
+        </p:spPr>
+        <p:txBody>
+          <a:bodyPr wrap="square" lIns="0" rIns="0" tIns="0" bIns="0" anchor="b">
+            <a:spAutoFit/>
+          </a:bodyPr>
+          <a:lstStyle/>
+          <a:p>
+            <a:pPr algn="ctr"/>
+            <a:r>
+              <a:rPr sz="850" b="0">
+                <a:solidFill>
+                  <a:srgbClr val="6B7076"/>
+                </a:solidFill>
+                <a:latin typeface="Replica LL TT"/>
+              </a:rPr>
               <a:t>structured per-account records, routed to the owner</a:t>
             </a:r>
           </a:p>
@@ -10040,13 +10302,13 @@
       </p:sp>
       <p:sp>
         <p:nvSpPr>
-          <p:cNvPr id="20" name="TextBox 19"/>
+          <p:cNvPr id="24" name="TextBox 23"/>
           <p:cNvSpPr txBox="1"/>
           <p:nvPr/>
         </p:nvSpPr>
         <p:spPr>
           <a:xfrm>
-            <a:off x="384048" y="5989320"/>
+            <a:off x="384048" y="5925312"/>
             <a:ext cx="11420856" cy="274320"/>
           </a:xfrm>
           <a:prstGeom prst="rect">
@@ -10106,7 +10368,14 @@
           <a:bodyPr wrap="square"/>
           <a:lstStyle/>
           <a:p>
-            <a:r>
+            <a:pPr algn="r"/>
+            <a:r>
+              <a:rPr sz="900" b="0">
+                <a:solidFill>
+                  <a:srgbClr val="6B7076"/>
+                </a:solidFill>
+                <a:latin typeface="Replica LL TT"/>
+              </a:rPr>
               <a:t>Oracle AI &amp; Data Solutions</a:t>
             </a:r>
           </a:p>
@@ -10157,7 +10426,7 @@
         </p:nvGraphicFramePr>
         <p:xfrm>
           <a:off x="384048" y="1810512"/>
-          <a:ext cx="11301984" cy="3886327"/>
+          <a:ext cx="11301984" cy="4206240"/>
         </p:xfrm>
         <a:graphic>
           <a:graphicData uri="http://schemas.openxmlformats.org/drawingml/2006/table">
@@ -10171,7 +10440,7 @@
                 <a:gridCol w="2877312"/>
                 <a:gridCol w="2877312"/>
               </a:tblGrid>
-              <a:tr h="312547">
+              <a:tr h="314455">
                 <a:tc>
                   <a:txBody>
                     <a:bodyPr wrap="square"/>
@@ -10265,7 +10534,7 @@
                   </a:tcPr>
                 </a:tc>
               </a:tr>
-              <a:tr h="738632">
+              <a:tr h="805496">
                 <a:tc>
                   <a:txBody>
                     <a:bodyPr wrap="square"/>
@@ -10273,7 +10542,7 @@
                     <a:p>
                       <a:pPr algn="l"/>
                       <a:r>
-                        <a:rPr sz="1000" b="1">
+                        <a:rPr sz="1100" b="1">
                           <a:solidFill>
                             <a:srgbClr val="26282B"/>
                           </a:solidFill>
@@ -10296,7 +10565,7 @@
                     <a:p>
                       <a:pPr algn="l"/>
                       <a:r>
-                        <a:rPr sz="1000" b="1">
+                        <a:rPr sz="1100" b="1">
                           <a:solidFill>
                             <a:srgbClr val="26282B"/>
                           </a:solidFill>
@@ -10319,7 +10588,7 @@
                     <a:p>
                       <a:pPr algn="l"/>
                       <a:r>
-                        <a:rPr sz="1000" b="1">
+                        <a:rPr sz="1100" b="1">
                           <a:solidFill>
                             <a:srgbClr val="26282B"/>
                           </a:solidFill>
@@ -10342,7 +10611,7 @@
                     <a:p>
                       <a:pPr algn="l"/>
                       <a:r>
-                        <a:rPr sz="1000" b="1">
+                        <a:rPr sz="1100" b="1">
                           <a:solidFill>
                             <a:srgbClr val="26282B"/>
                           </a:solidFill>
@@ -10359,7 +10628,7 @@
                   </a:tcPr>
                 </a:tc>
               </a:tr>
-              <a:tr h="301752">
+              <a:tr h="303594">
                 <a:tc>
                   <a:txBody>
                     <a:bodyPr wrap="square"/>
@@ -10453,7 +10722,7 @@
                   </a:tcPr>
                 </a:tc>
               </a:tr>
-              <a:tr h="475234">
+              <a:tr h="478136">
                 <a:tc>
                   <a:txBody>
                     <a:bodyPr wrap="square"/>
@@ -10547,7 +10816,7 @@
                   </a:tcPr>
                 </a:tc>
               </a:tr>
-              <a:tr h="301752">
+              <a:tr h="303594">
                 <a:tc>
                   <a:txBody>
                     <a:bodyPr wrap="square"/>
@@ -10641,7 +10910,7 @@
                   </a:tcPr>
                 </a:tc>
               </a:tr>
-              <a:tr h="351282">
+              <a:tr h="400193">
                 <a:tc>
                   <a:txBody>
                     <a:bodyPr wrap="square"/>
@@ -10649,7 +10918,7 @@
                     <a:p>
                       <a:pPr algn="l"/>
                       <a:r>
-                        <a:rPr sz="1290" b="1">
+                        <a:rPr sz="1100" b="1">
                           <a:solidFill>
                             <a:srgbClr val="26282B"/>
                           </a:solidFill>
@@ -10672,11 +10941,12 @@
                     <a:p>
                       <a:pPr algn="ctr"/>
                       <a:r>
-                        <a:rPr sz="1500" b="1">
+                        <a:rPr sz="1800" b="1">
                           <a:solidFill>
                             <a:srgbClr val="26282B"/>
                           </a:solidFill>
-                          <a:latin typeface="Replica LL TT"/>
+                          <a:latin typeface="Apple Symbols"/>
+                          <a:sym typeface="Segoe UI Symbol"/>
                         </a:rPr>
                         <a:t>◐</a:t>
                       </a:r>
@@ -10695,11 +10965,12 @@
                     <a:p>
                       <a:pPr algn="ctr"/>
                       <a:r>
-                        <a:rPr sz="1500" b="1">
+                        <a:rPr sz="1800" b="1">
                           <a:solidFill>
                             <a:srgbClr val="26282B"/>
                           </a:solidFill>
-                          <a:latin typeface="Replica LL TT"/>
+                          <a:latin typeface="Apple Symbols"/>
+                          <a:sym typeface="Segoe UI Symbol"/>
                         </a:rPr>
                         <a:t>●</a:t>
                       </a:r>
@@ -10718,11 +10989,12 @@
                     <a:p>
                       <a:pPr algn="ctr"/>
                       <a:r>
-                        <a:rPr sz="1500" b="1">
+                        <a:rPr sz="1800" b="1">
                           <a:solidFill>
                             <a:srgbClr val="26282B"/>
                           </a:solidFill>
-                          <a:latin typeface="Replica LL TT"/>
+                          <a:latin typeface="Apple Symbols"/>
+                          <a:sym typeface="Segoe UI Symbol"/>
                         </a:rPr>
                         <a:t>●●</a:t>
                       </a:r>
@@ -10735,7 +11007,7 @@
                   </a:tcPr>
                 </a:tc>
               </a:tr>
-              <a:tr h="351282">
+              <a:tr h="400193">
                 <a:tc>
                   <a:txBody>
                     <a:bodyPr wrap="square"/>
@@ -10743,7 +11015,7 @@
                     <a:p>
                       <a:pPr algn="l"/>
                       <a:r>
-                        <a:rPr sz="1290" b="1">
+                        <a:rPr sz="1100" b="1">
                           <a:solidFill>
                             <a:srgbClr val="26282B"/>
                           </a:solidFill>
@@ -10766,11 +11038,12 @@
                     <a:p>
                       <a:pPr algn="ctr"/>
                       <a:r>
-                        <a:rPr sz="1500" b="1">
+                        <a:rPr sz="1800" b="1">
                           <a:solidFill>
                             <a:srgbClr val="26282B"/>
                           </a:solidFill>
-                          <a:latin typeface="Replica LL TT"/>
+                          <a:latin typeface="Apple Symbols"/>
+                          <a:sym typeface="Segoe UI Symbol"/>
                         </a:rPr>
                         <a:t>◐</a:t>
                       </a:r>
@@ -10789,11 +11062,12 @@
                     <a:p>
                       <a:pPr algn="ctr"/>
                       <a:r>
-                        <a:rPr sz="1500" b="1">
+                        <a:rPr sz="1800" b="1">
                           <a:solidFill>
                             <a:srgbClr val="26282B"/>
                           </a:solidFill>
-                          <a:latin typeface="Replica LL TT"/>
+                          <a:latin typeface="Apple Symbols"/>
+                          <a:sym typeface="Segoe UI Symbol"/>
                         </a:rPr>
                         <a:t>●</a:t>
                       </a:r>
@@ -10812,11 +11086,12 @@
                     <a:p>
                       <a:pPr algn="ctr"/>
                       <a:r>
-                        <a:rPr sz="1500" b="1">
+                        <a:rPr sz="1800" b="1">
                           <a:solidFill>
                             <a:srgbClr val="26282B"/>
                           </a:solidFill>
-                          <a:latin typeface="Replica LL TT"/>
+                          <a:latin typeface="Apple Symbols"/>
+                          <a:sym typeface="Segoe UI Symbol"/>
                         </a:rPr>
                         <a:t>●●</a:t>
                       </a:r>
@@ -10829,7 +11104,7 @@
                   </a:tcPr>
                 </a:tc>
               </a:tr>
-              <a:tr h="351282">
+              <a:tr h="400193">
                 <a:tc>
                   <a:txBody>
                     <a:bodyPr wrap="square"/>
@@ -10837,7 +11112,7 @@
                     <a:p>
                       <a:pPr algn="l"/>
                       <a:r>
-                        <a:rPr sz="1290" b="1">
+                        <a:rPr sz="1100" b="1">
                           <a:solidFill>
                             <a:srgbClr val="26282B"/>
                           </a:solidFill>
@@ -10860,11 +11135,12 @@
                     <a:p>
                       <a:pPr algn="ctr"/>
                       <a:r>
-                        <a:rPr sz="1500" b="1">
+                        <a:rPr sz="1800" b="1">
                           <a:solidFill>
                             <a:srgbClr val="26282B"/>
                           </a:solidFill>
-                          <a:latin typeface="Replica LL TT"/>
+                          <a:latin typeface="Apple Symbols"/>
+                          <a:sym typeface="Segoe UI Symbol"/>
                         </a:rPr>
                         <a:t>◐</a:t>
                       </a:r>
@@ -10883,11 +11159,12 @@
                     <a:p>
                       <a:pPr algn="ctr"/>
                       <a:r>
-                        <a:rPr sz="1500" b="1">
+                        <a:rPr sz="1800" b="1">
                           <a:solidFill>
                             <a:srgbClr val="26282B"/>
                           </a:solidFill>
-                          <a:latin typeface="Replica LL TT"/>
+                          <a:latin typeface="Apple Symbols"/>
+                          <a:sym typeface="Segoe UI Symbol"/>
                         </a:rPr>
                         <a:t>●</a:t>
                       </a:r>
@@ -10906,11 +11183,12 @@
                     <a:p>
                       <a:pPr algn="ctr"/>
                       <a:r>
-                        <a:rPr sz="1500" b="1">
+                        <a:rPr sz="1800" b="1">
                           <a:solidFill>
                             <a:srgbClr val="26282B"/>
                           </a:solidFill>
-                          <a:latin typeface="Replica LL TT"/>
+                          <a:latin typeface="Apple Symbols"/>
+                          <a:sym typeface="Segoe UI Symbol"/>
                         </a:rPr>
                         <a:t>●●</a:t>
                       </a:r>
@@ -10923,7 +11201,7 @@
                   </a:tcPr>
                 </a:tc>
               </a:tr>
-              <a:tr h="351282">
+              <a:tr h="400193">
                 <a:tc>
                   <a:txBody>
                     <a:bodyPr wrap="square"/>
@@ -10931,7 +11209,7 @@
                     <a:p>
                       <a:pPr algn="l"/>
                       <a:r>
-                        <a:rPr sz="1290" b="1">
+                        <a:rPr sz="1100" b="1">
                           <a:solidFill>
                             <a:srgbClr val="26282B"/>
                           </a:solidFill>
@@ -10954,11 +11232,12 @@
                     <a:p>
                       <a:pPr algn="ctr"/>
                       <a:r>
-                        <a:rPr sz="1500" b="1">
+                        <a:rPr sz="1800" b="1">
                           <a:solidFill>
                             <a:srgbClr val="26282B"/>
                           </a:solidFill>
-                          <a:latin typeface="Replica LL TT"/>
+                          <a:latin typeface="Apple Symbols"/>
+                          <a:sym typeface="Segoe UI Symbol"/>
                         </a:rPr>
                         <a:t>◐</a:t>
                       </a:r>
@@ -10977,11 +11256,12 @@
                     <a:p>
                       <a:pPr algn="ctr"/>
                       <a:r>
-                        <a:rPr sz="1500" b="1">
+                        <a:rPr sz="1800" b="1">
                           <a:solidFill>
                             <a:srgbClr val="26282B"/>
                           </a:solidFill>
-                          <a:latin typeface="Replica LL TT"/>
+                          <a:latin typeface="Apple Symbols"/>
+                          <a:sym typeface="Segoe UI Symbol"/>
                         </a:rPr>
                         <a:t>●</a:t>
                       </a:r>
@@ -11000,11 +11280,12 @@
                     <a:p>
                       <a:pPr algn="ctr"/>
                       <a:r>
-                        <a:rPr sz="1500" b="1">
+                        <a:rPr sz="1800" b="1">
                           <a:solidFill>
                             <a:srgbClr val="26282B"/>
                           </a:solidFill>
-                          <a:latin typeface="Replica LL TT"/>
+                          <a:latin typeface="Apple Symbols"/>
+                          <a:sym typeface="Segoe UI Symbol"/>
                         </a:rPr>
                         <a:t>●●</a:t>
                       </a:r>
@@ -11017,7 +11298,7 @@
                   </a:tcPr>
                 </a:tc>
               </a:tr>
-              <a:tr h="351282">
+              <a:tr h="400193">
                 <a:tc>
                   <a:txBody>
                     <a:bodyPr wrap="square"/>
@@ -11025,7 +11306,7 @@
                     <a:p>
                       <a:pPr algn="l"/>
                       <a:r>
-                        <a:rPr sz="1290" b="1">
+                        <a:rPr sz="1100" b="1">
                           <a:solidFill>
                             <a:srgbClr val="26282B"/>
                           </a:solidFill>
@@ -11048,11 +11329,12 @@
                     <a:p>
                       <a:pPr algn="ctr"/>
                       <a:r>
-                        <a:rPr sz="1500" b="1">
+                        <a:rPr sz="1800" b="1">
                           <a:solidFill>
                             <a:srgbClr val="26282B"/>
                           </a:solidFill>
-                          <a:latin typeface="Replica LL TT"/>
+                          <a:latin typeface="Apple Symbols"/>
+                          <a:sym typeface="Segoe UI Symbol"/>
                         </a:rPr>
                         <a:t>◐</a:t>
                       </a:r>
@@ -11071,11 +11353,12 @@
                     <a:p>
                       <a:pPr algn="ctr"/>
                       <a:r>
-                        <a:rPr sz="1500" b="1">
+                        <a:rPr sz="1800" b="1">
                           <a:solidFill>
                             <a:srgbClr val="26282B"/>
                           </a:solidFill>
-                          <a:latin typeface="Replica LL TT"/>
+                          <a:latin typeface="Apple Symbols"/>
+                          <a:sym typeface="Segoe UI Symbol"/>
                         </a:rPr>
                         <a:t>●</a:t>
                       </a:r>
@@ -11094,11 +11377,12 @@
                     <a:p>
                       <a:pPr algn="ctr"/>
                       <a:r>
-                        <a:rPr sz="1500" b="1">
+                        <a:rPr sz="1800" b="1">
                           <a:solidFill>
                             <a:srgbClr val="26282B"/>
                           </a:solidFill>
-                          <a:latin typeface="Replica LL TT"/>
+                          <a:latin typeface="Apple Symbols"/>
+                          <a:sym typeface="Segoe UI Symbol"/>
                         </a:rPr>
                         <a:t>●●</a:t>
                       </a:r>
@@ -11143,9 +11427,72 @@
                 <a:solidFill>
                   <a:srgbClr val="8A9095"/>
                 </a:solidFill>
+                <a:latin typeface="Apple Symbols"/>
+              </a:rPr>
+              <a:t>◐</a:t>
+            </a:r>
+            <a:r>
+              <a:rPr sz="850" b="0">
+                <a:solidFill>
+                  <a:srgbClr val="8A9095"/>
+                </a:solidFill>
                 <a:latin typeface="Replica LL TT"/>
               </a:rPr>
-              <a:t>◐ partial   ● included   ●● multi-region / advanced   — not in this tier</a:t>
+              <a:t> partial   </a:t>
+            </a:r>
+            <a:r>
+              <a:rPr sz="850" b="0">
+                <a:solidFill>
+                  <a:srgbClr val="8A9095"/>
+                </a:solidFill>
+                <a:latin typeface="Apple Symbols"/>
+              </a:rPr>
+              <a:t>●</a:t>
+            </a:r>
+            <a:r>
+              <a:rPr sz="850" b="0">
+                <a:solidFill>
+                  <a:srgbClr val="8A9095"/>
+                </a:solidFill>
+                <a:latin typeface="Replica LL TT"/>
+              </a:rPr>
+              <a:t> included   </a:t>
+            </a:r>
+            <a:r>
+              <a:rPr sz="850" b="0">
+                <a:solidFill>
+                  <a:srgbClr val="8A9095"/>
+                </a:solidFill>
+                <a:latin typeface="Apple Symbols"/>
+              </a:rPr>
+              <a:t>●●</a:t>
+            </a:r>
+            <a:r>
+              <a:rPr sz="850" b="0">
+                <a:solidFill>
+                  <a:srgbClr val="8A9095"/>
+                </a:solidFill>
+                <a:latin typeface="Replica LL TT"/>
+              </a:rPr>
+              <a:t> multi-region / advanced   </a:t>
+            </a:r>
+            <a:r>
+              <a:rPr sz="850" b="0">
+                <a:solidFill>
+                  <a:srgbClr val="8A9095"/>
+                </a:solidFill>
+                <a:latin typeface="Apple Symbols"/>
+              </a:rPr>
+              <a:t>—</a:t>
+            </a:r>
+            <a:r>
+              <a:rPr sz="850" b="0">
+                <a:solidFill>
+                  <a:srgbClr val="8A9095"/>
+                </a:solidFill>
+                <a:latin typeface="Replica LL TT"/>
+              </a:rPr>
+              <a:t> not in this tier</a:t>
             </a:r>
           </a:p>
         </p:txBody>

--- a/outputs/oracle-packs/account-insights/artifacts/account-insights-sales-deck.pptx
+++ b/outputs/oracle-packs/account-insights/artifacts/account-insights-sales-deck.pptx
@@ -2005,7 +2005,7 @@
                 </a:solidFill>
                 <a:latin typeface="+mj-lt"/>
               </a:rPr>
-              <a:t>Any team responsible for a named set of companies it has to stay current on — the accounts it sells to, the partners it develops, or the companies in its portfolio.</a:t>
+              <a:t>Any team responsible for a named set of companies — the accounts it sells to, the partners it develops, the holdings in its portfolio.</a:t>
             </a:r>
           </a:p>
         </p:txBody>
@@ -2101,7 +2101,7 @@
         </p:nvGraphicFramePr>
         <p:xfrm>
           <a:off x="384048" y="1874520"/>
-          <a:ext cx="11420856" cy="4178805"/>
+          <a:ext cx="11420856" cy="4178809"/>
         </p:xfrm>
         <a:graphic>
           <a:graphicData uri="http://schemas.openxmlformats.org/drawingml/2006/table">
@@ -2115,7 +2115,7 @@
                 <a:gridCol w="3029712"/>
                 <a:gridCol w="3029712"/>
               </a:tblGrid>
-              <a:tr h="376815">
+              <a:tr h="395373">
                 <a:tc>
                   <a:txBody>
                     <a:bodyPr wrap="square"/>
@@ -2209,7 +2209,7 @@
                   </a:tcPr>
                 </a:tc>
               </a:tr>
-              <a:tr h="927875">
+              <a:tr h="767772">
                 <a:tc>
                   <a:txBody>
                     <a:bodyPr wrap="square"/>
@@ -2246,7 +2246,7 @@
                           </a:solidFill>
                           <a:latin typeface="Replica LL TT"/>
                         </a:rPr>
-                        <a:t>One signal set, one account segment, file-based in and out: prove the reviewer agrees.</a:t>
+                        <a:t>One signal set, one segment, files in and out: prove the reviewer agrees.</a:t>
                       </a:r>
                     </a:p>
                   </a:txBody>
@@ -2269,7 +2269,7 @@
                           </a:solidFill>
                           <a:latin typeface="Replica LL TT"/>
                         </a:rPr>
-                        <a:t>Wire it into the team's working day: their own licensed feeds in, their system of record out.</a:t>
+                        <a:t>Wired into the team's day: licensed feeds in, system of record out.</a:t>
                       </a:r>
                     </a:p>
                   </a:txBody>
@@ -2292,7 +2292,7 @@
                           </a:solidFill>
                           <a:latin typeface="Replica LL TT"/>
                         </a:rPr>
-                        <a:t>Make it improve: live write-back, outcome capture, and confidence that has been tested against what actually happened.</a:t>
+                        <a:t>Make it improve: live write-back, outcome capture, confidence tested against real outcomes.</a:t>
                       </a:r>
                     </a:p>
                   </a:txBody>
@@ -2303,7 +2303,7 @@
                   </a:tcPr>
                 </a:tc>
               </a:tr>
-              <a:tr h="535595">
+              <a:tr h="561973">
                 <a:tc>
                   <a:txBody>
                     <a:bodyPr wrap="square"/>
@@ -2427,7 +2427,7 @@
                   </a:tcPr>
                 </a:tc>
               </a:tr>
-              <a:tr h="535595">
+              <a:tr h="561973">
                 <a:tc>
                   <a:txBody>
                     <a:bodyPr wrap="square"/>
@@ -2551,7 +2551,7 @@
                   </a:tcPr>
                 </a:tc>
               </a:tr>
-              <a:tr h="731735">
+              <a:tr h="767772">
                 <a:tc>
                   <a:txBody>
                     <a:bodyPr wrap="square"/>
@@ -2675,7 +2675,7 @@
                   </a:tcPr>
                 </a:tc>
               </a:tr>
-              <a:tr h="535595">
+              <a:tr h="561973">
                 <a:tc>
                   <a:txBody>
                     <a:bodyPr wrap="square"/>
@@ -2799,7 +2799,7 @@
                   </a:tcPr>
                 </a:tc>
               </a:tr>
-              <a:tr h="535595">
+              <a:tr h="561973">
                 <a:tc>
                   <a:txBody>
                     <a:bodyPr wrap="square"/>
@@ -5273,12 +5273,21 @@
           </a:p>
         </p:txBody>
       </p:sp>
-      <p:sp>
-        <p:nvSpPr>
-          <p:cNvPr id="10" name="Rectangle 9"/>
-          <p:cNvSpPr/>
-          <p:nvPr/>
-        </p:nvSpPr>
+      <p:pic>
+        <p:nvPicPr>
+          <p:cNvPr id="10" name="Picture 9" descr="today-A-filefolders-business.jpg"/>
+          <p:cNvPicPr>
+            <a:picLocks noChangeAspect="1"/>
+          </p:cNvPicPr>
+          <p:nvPr/>
+        </p:nvPicPr>
+        <p:blipFill>
+          <a:blip r:embed="rId2"/>
+          <a:srcRect t="23172" b="23172"/>
+          <a:stretch>
+            <a:fillRect/>
+          </a:stretch>
+        </p:blipFill>
         <p:spPr>
           <a:xfrm>
             <a:off x="384048" y="4069080"/>
@@ -5287,77 +5296,11 @@
           <a:prstGeom prst="rect">
             <a:avLst/>
           </a:prstGeom>
-          <a:solidFill>
-            <a:srgbClr val="F4F6F7"/>
-          </a:solidFill>
-          <a:ln w="9525">
-            <a:solidFill>
-              <a:srgbClr val="D2D8DD"/>
-            </a:solidFill>
-            <a:prstDash val="dash"/>
-          </a:ln>
-          <a:effectLst/>
-        </p:spPr>
-        <p:style>
-          <a:lnRef idx="1">
-            <a:schemeClr val="accent1"/>
-          </a:lnRef>
-          <a:fillRef idx="3">
-            <a:schemeClr val="accent1"/>
-          </a:fillRef>
-          <a:effectRef idx="2">
-            <a:schemeClr val="accent1"/>
-          </a:effectRef>
-          <a:fontRef idx="minor">
-            <a:schemeClr val="lt1"/>
-          </a:fontRef>
-        </p:style>
-        <p:txBody>
-          <a:bodyPr rtlCol="0" anchor="ctr" wrap="square"/>
-          <a:lstStyle/>
-          <a:p>
-            <a:pPr algn="ctr"/>
-          </a:p>
-        </p:txBody>
-      </p:sp>
-      <p:sp>
-        <p:nvSpPr>
-          <p:cNvPr id="11" name="TextBox 10"/>
-          <p:cNvSpPr txBox="1"/>
-          <p:nvPr/>
-        </p:nvSpPr>
-        <p:spPr>
-          <a:xfrm>
-            <a:off x="566928" y="4069080"/>
-            <a:ext cx="5138928" cy="1965960"/>
-          </a:xfrm>
-          <a:prstGeom prst="rect">
-            <a:avLst/>
-          </a:prstGeom>
-          <a:noFill/>
-        </p:spPr>
-        <p:txBody>
-          <a:bodyPr wrap="square" lIns="0" rIns="0" tIns="0" bIns="0" anchor="ctr">
-            <a:spAutoFit/>
-          </a:bodyPr>
-          <a:lstStyle/>
-          <a:p>
-            <a:pPr algn="ctr"/>
-            <a:r>
-              <a:rPr sz="950" b="0">
-                <a:solidFill>
-                  <a:srgbClr val="8A9095"/>
-                </a:solidFill>
-                <a:latin typeface="Replica LL TT"/>
-              </a:rPr>
-              <a:t>image to be chosen</a:t>
-            </a:r>
-          </a:p>
-        </p:txBody>
-      </p:sp>
-      <p:sp>
-        <p:nvSpPr>
-          <p:cNvPr id="12" name="Rectangle 11"/>
+        </p:spPr>
+      </p:pic>
+      <p:sp>
+        <p:nvSpPr>
+          <p:cNvPr id="11" name="Rectangle 10"/>
           <p:cNvSpPr/>
           <p:nvPr/>
         </p:nvSpPr>
@@ -5401,7 +5344,7 @@
       </p:sp>
       <p:sp>
         <p:nvSpPr>
-          <p:cNvPr id="13" name="TextBox 12"/>
+          <p:cNvPr id="12" name="TextBox 11"/>
           <p:cNvSpPr txBox="1"/>
           <p:nvPr/>
         </p:nvSpPr>
@@ -5436,7 +5379,7 @@
       </p:sp>
       <p:sp>
         <p:nvSpPr>
-          <p:cNvPr id="14" name="TextBox 13"/>
+          <p:cNvPr id="13" name="TextBox 12"/>
           <p:cNvSpPr txBox="1"/>
           <p:nvPr/>
         </p:nvSpPr>
@@ -5469,12 +5412,21 @@
           </a:p>
         </p:txBody>
       </p:sp>
-      <p:sp>
-        <p:nvSpPr>
-          <p:cNvPr id="15" name="Rectangle 14"/>
-          <p:cNvSpPr/>
-          <p:nvPr/>
-        </p:nvSpPr>
+      <p:pic>
+        <p:nvPicPr>
+          <p:cNvPr id="14" name="Picture 13" descr="tomorrow-C-analytics-charts.jpg"/>
+          <p:cNvPicPr>
+            <a:picLocks noChangeAspect="1"/>
+          </p:cNvPicPr>
+          <p:nvPr/>
+        </p:nvPicPr>
+        <p:blipFill>
+          <a:blip r:embed="rId3"/>
+          <a:srcRect t="23214" b="23214"/>
+          <a:stretch>
+            <a:fillRect/>
+          </a:stretch>
+        </p:blipFill>
         <p:spPr>
           <a:xfrm>
             <a:off x="6291072" y="4069080"/>
@@ -5483,74 +5435,8 @@
           <a:prstGeom prst="rect">
             <a:avLst/>
           </a:prstGeom>
-          <a:solidFill>
-            <a:srgbClr val="F4F6F7"/>
-          </a:solidFill>
-          <a:ln w="9525">
-            <a:solidFill>
-              <a:srgbClr val="D2D8DD"/>
-            </a:solidFill>
-            <a:prstDash val="dash"/>
-          </a:ln>
-          <a:effectLst/>
-        </p:spPr>
-        <p:style>
-          <a:lnRef idx="1">
-            <a:schemeClr val="accent1"/>
-          </a:lnRef>
-          <a:fillRef idx="3">
-            <a:schemeClr val="accent1"/>
-          </a:fillRef>
-          <a:effectRef idx="2">
-            <a:schemeClr val="accent1"/>
-          </a:effectRef>
-          <a:fontRef idx="minor">
-            <a:schemeClr val="lt1"/>
-          </a:fontRef>
-        </p:style>
-        <p:txBody>
-          <a:bodyPr rtlCol="0" anchor="ctr" wrap="square"/>
-          <a:lstStyle/>
-          <a:p>
-            <a:pPr algn="ctr"/>
-          </a:p>
-        </p:txBody>
-      </p:sp>
-      <p:sp>
-        <p:nvSpPr>
-          <p:cNvPr id="16" name="TextBox 15"/>
-          <p:cNvSpPr txBox="1"/>
-          <p:nvPr/>
-        </p:nvSpPr>
-        <p:spPr>
-          <a:xfrm>
-            <a:off x="6473952" y="4069080"/>
-            <a:ext cx="5138928" cy="1965960"/>
-          </a:xfrm>
-          <a:prstGeom prst="rect">
-            <a:avLst/>
-          </a:prstGeom>
-          <a:noFill/>
-        </p:spPr>
-        <p:txBody>
-          <a:bodyPr wrap="square" lIns="0" rIns="0" tIns="0" bIns="0" anchor="ctr">
-            <a:spAutoFit/>
-          </a:bodyPr>
-          <a:lstStyle/>
-          <a:p>
-            <a:pPr algn="ctr"/>
-            <a:r>
-              <a:rPr sz="950" b="0">
-                <a:solidFill>
-                  <a:srgbClr val="8A9095"/>
-                </a:solidFill>
-                <a:latin typeface="Replica LL TT"/>
-              </a:rPr>
-              <a:t>image to be chosen</a:t>
-            </a:r>
-          </a:p>
-        </p:txBody>
-      </p:sp>
+        </p:spPr>
+      </p:pic>
     </p:spTree>
   </p:cSld>
   <p:clrMapOvr>
@@ -8688,7 +8574,7 @@
                 </a:solidFill>
                 <a:latin typeface="Replica LL TT"/>
               </a:rPr>
-              <a:t>Account insights by SoftServe (application)</a:t>
+              <a:t>Account insights by SoftServe</a:t>
             </a:r>
           </a:p>
         </p:txBody>
@@ -9662,22 +9548,6 @@
               <a:t>Account insights by SoftServe</a:t>
             </a:r>
           </a:p>
-          <a:p>
-            <a:pPr algn="ctr">
-              <a:spcBef>
-                <a:spcPts val="200"/>
-              </a:spcBef>
-            </a:pPr>
-            <a:r>
-              <a:rPr sz="1000" b="0">
-                <a:solidFill>
-                  <a:srgbClr val="FFFFFF"/>
-                </a:solidFill>
-                <a:latin typeface="Replica LL TT"/>
-              </a:rPr>
-              <a:t>Signal normalization and account resolution, Catalog mapping and ripple reasoning, Magnitude and confidence scoring, Reviewer UI and evaluation harness</a:t>
-            </a:r>
-          </a:p>
         </p:txBody>
       </p:sp>
       <p:sp>
@@ -10426,7 +10296,7 @@
         </p:nvGraphicFramePr>
         <p:xfrm>
           <a:off x="384048" y="1810512"/>
-          <a:ext cx="11301984" cy="4206240"/>
+          <a:ext cx="11301984" cy="4206242"/>
         </p:xfrm>
         <a:graphic>
           <a:graphicData uri="http://schemas.openxmlformats.org/drawingml/2006/table">
@@ -10440,7 +10310,7 @@
                 <a:gridCol w="2877312"/>
                 <a:gridCol w="2877312"/>
               </a:tblGrid>
-              <a:tr h="314455">
+              <a:tr h="327820">
                 <a:tc>
                   <a:txBody>
                     <a:bodyPr wrap="square"/>
@@ -10534,7 +10404,7 @@
                   </a:tcPr>
                 </a:tc>
               </a:tr>
-              <a:tr h="805496">
+              <a:tr h="660967">
                 <a:tc>
                   <a:txBody>
                     <a:bodyPr wrap="square"/>
@@ -10571,7 +10441,7 @@
                           </a:solidFill>
                           <a:latin typeface="Replica LL TT"/>
                         </a:rPr>
-                        <a:t>One signal set, one account segment, file-based in and out: prove the reviewer agrees.</a:t>
+                        <a:t>One signal set, one segment, files in and out: prove the reviewer agrees.</a:t>
                       </a:r>
                     </a:p>
                   </a:txBody>
@@ -10594,7 +10464,7 @@
                           </a:solidFill>
                           <a:latin typeface="Replica LL TT"/>
                         </a:rPr>
-                        <a:t>Wire it into the team's working day: their own licensed feeds in, their system of record out.</a:t>
+                        <a:t>Wired into the team's day: licensed feeds in, system of record out.</a:t>
                       </a:r>
                     </a:p>
                   </a:txBody>
@@ -10617,7 +10487,7 @@
                           </a:solidFill>
                           <a:latin typeface="Replica LL TT"/>
                         </a:rPr>
-                        <a:t>Make it improve: live write-back, outcome capture, and confidence that has been tested against what actually happened.</a:t>
+                        <a:t>Make it improve: live write-back, outcome capture, confidence tested against real outcomes.</a:t>
                       </a:r>
                     </a:p>
                   </a:txBody>
@@ -10628,7 +10498,7 @@
                   </a:tcPr>
                 </a:tc>
               </a:tr>
-              <a:tr h="303594">
+              <a:tr h="316497">
                 <a:tc>
                   <a:txBody>
                     <a:bodyPr wrap="square"/>
@@ -10722,7 +10592,7 @@
                   </a:tcPr>
                 </a:tc>
               </a:tr>
-              <a:tr h="478136">
+              <a:tr h="498456">
                 <a:tc>
                   <a:txBody>
                     <a:bodyPr wrap="square"/>
@@ -10816,7 +10686,7 @@
                   </a:tcPr>
                 </a:tc>
               </a:tr>
-              <a:tr h="303594">
+              <a:tr h="316497">
                 <a:tc>
                   <a:txBody>
                     <a:bodyPr wrap="square"/>
@@ -10910,7 +10780,7 @@
                   </a:tcPr>
                 </a:tc>
               </a:tr>
-              <a:tr h="400193">
+              <a:tr h="417201">
                 <a:tc>
                   <a:txBody>
                     <a:bodyPr wrap="square"/>
@@ -11007,7 +10877,7 @@
                   </a:tcPr>
                 </a:tc>
               </a:tr>
-              <a:tr h="400193">
+              <a:tr h="417201">
                 <a:tc>
                   <a:txBody>
                     <a:bodyPr wrap="square"/>
@@ -11104,7 +10974,7 @@
                   </a:tcPr>
                 </a:tc>
               </a:tr>
-              <a:tr h="400193">
+              <a:tr h="417201">
                 <a:tc>
                   <a:txBody>
                     <a:bodyPr wrap="square"/>
@@ -11201,7 +11071,7 @@
                   </a:tcPr>
                 </a:tc>
               </a:tr>
-              <a:tr h="400193">
+              <a:tr h="417201">
                 <a:tc>
                   <a:txBody>
                     <a:bodyPr wrap="square"/>
@@ -11298,7 +11168,7 @@
                   </a:tcPr>
                 </a:tc>
               </a:tr>
-              <a:tr h="400193">
+              <a:tr h="417201">
                 <a:tc>
                   <a:txBody>
                     <a:bodyPr wrap="square"/>
